--- a/docs/deck/TechMap_CreateML_Sound.pptx
+++ b/docs/deck/TechMap_CreateML_Sound.pptx
@@ -50,9 +50,11 @@
     <p:sldId id="298" r:id="rId44"/>
     <p:sldId id="299" r:id="rId45"/>
     <p:sldId id="300" r:id="rId46"/>
+    <p:sldId id="301" r:id="rId47"/>
+    <p:sldId id="302" r:id="rId48"/>
   </p:sldIdLst>
   <p:notesMasterIdLst>
-    <p:notesMasterId r:id="rId47"/>
+    <p:notesMasterId r:id="rId49"/>
   </p:notesMasterIdLst>
   <p:sldSz cx="12192000" cy="6858000"/>
   <p:notesSz cx="6858000" cy="12192000"/>
@@ -4002,6 +4004,182 @@
             <a:fld id="{F7021451-1387-4CA6-816F-3879F97B5CBC}" type="slidenum">
               <a:rPr lang="en-US"/>
               <a:t>45</a:t>
+            </a:fld>
+            <a:endParaRPr lang="en-US"/>
+          </a:p>
+        </p:txBody>
+      </p:sp>
+    </p:spTree>
+    <p:extLst>
+      <p:ext uri="{BB962C8B-B14F-4D97-AF65-F5344CB8AC3E}">
+        <p14:creationId xmlns:p14="http://schemas.microsoft.com/office/powerpoint/2010/main" val="1024086991"/>
+      </p:ext>
+    </p:extLst>
+  </p:cSld>
+  <p:clrMapOvr>
+    <a:masterClrMapping/>
+  </p:clrMapOvr>
+</p:notes>
+</file>
+
+<file path=ppt/notesSlides/notesSlide46.xml><?xml version="1.0" encoding="utf-8"?>
+<p:notes xmlns:a="http://schemas.openxmlformats.org/drawingml/2006/main" xmlns:r="http://schemas.openxmlformats.org/officeDocument/2006/relationships" xmlns:p="http://schemas.openxmlformats.org/presentationml/2006/main">
+  <p:cSld>
+    <p:spTree>
+      <p:nvGrpSpPr>
+        <p:cNvPr id="1" name=""/>
+        <p:cNvGrpSpPr/>
+        <p:nvPr/>
+      </p:nvGrpSpPr>
+      <p:grpSpPr>
+        <a:xfrm>
+          <a:off x="0" y="0"/>
+          <a:ext cx="0" cy="0"/>
+          <a:chOff x="0" y="0"/>
+          <a:chExt cx="0" cy="0"/>
+        </a:xfrm>
+      </p:grpSpPr>
+      <p:sp>
+        <p:nvSpPr>
+          <p:cNvPr id="2" name="Slide Image Placeholder 1"/>
+          <p:cNvSpPr>
+            <a:spLocks noGrp="1" noRot="1" noChangeAspect="1"/>
+          </p:cNvSpPr>
+          <p:nvPr>
+            <p:ph type="sldImg"/>
+          </p:nvPr>
+        </p:nvSpPr>
+        <p:spPr/>
+      </p:sp>
+      <p:sp>
+        <p:nvSpPr>
+          <p:cNvPr id="3" name="Notes Placeholder 2"/>
+          <p:cNvSpPr>
+            <a:spLocks noGrp="1"/>
+          </p:cNvSpPr>
+          <p:nvPr>
+            <p:ph type="body" idx="1"/>
+          </p:nvPr>
+        </p:nvSpPr>
+        <p:spPr/>
+        <p:txBody>
+          <a:bodyPr/>
+          <a:lstStyle/>
+          <a:p>
+            <a:r>
+              <a:rPr lang="en-US" dirty="0"/>
+              <a:t/>
+            </a:r>
+            <a:endParaRPr lang="en-US" dirty="0"/>
+          </a:p>
+        </p:txBody>
+      </p:sp>
+      <p:sp>
+        <p:nvSpPr>
+          <p:cNvPr id="4" name="Slide Number Placeholder 3"/>
+          <p:cNvSpPr>
+            <a:spLocks noGrp="1"/>
+          </p:cNvSpPr>
+          <p:nvPr>
+            <p:ph type="sldNum" sz="quarter" idx="10"/>
+          </p:nvPr>
+        </p:nvSpPr>
+        <p:spPr/>
+        <p:txBody>
+          <a:bodyPr/>
+          <a:lstStyle/>
+          <a:p>
+            <a:fld id="{F7021451-1387-4CA6-816F-3879F97B5CBC}" type="slidenum">
+              <a:rPr lang="en-US"/>
+              <a:t>46</a:t>
+            </a:fld>
+            <a:endParaRPr lang="en-US"/>
+          </a:p>
+        </p:txBody>
+      </p:sp>
+    </p:spTree>
+    <p:extLst>
+      <p:ext uri="{BB962C8B-B14F-4D97-AF65-F5344CB8AC3E}">
+        <p14:creationId xmlns:p14="http://schemas.microsoft.com/office/powerpoint/2010/main" val="1024086991"/>
+      </p:ext>
+    </p:extLst>
+  </p:cSld>
+  <p:clrMapOvr>
+    <a:masterClrMapping/>
+  </p:clrMapOvr>
+</p:notes>
+</file>
+
+<file path=ppt/notesSlides/notesSlide47.xml><?xml version="1.0" encoding="utf-8"?>
+<p:notes xmlns:a="http://schemas.openxmlformats.org/drawingml/2006/main" xmlns:r="http://schemas.openxmlformats.org/officeDocument/2006/relationships" xmlns:p="http://schemas.openxmlformats.org/presentationml/2006/main">
+  <p:cSld>
+    <p:spTree>
+      <p:nvGrpSpPr>
+        <p:cNvPr id="1" name=""/>
+        <p:cNvGrpSpPr/>
+        <p:nvPr/>
+      </p:nvGrpSpPr>
+      <p:grpSpPr>
+        <a:xfrm>
+          <a:off x="0" y="0"/>
+          <a:ext cx="0" cy="0"/>
+          <a:chOff x="0" y="0"/>
+          <a:chExt cx="0" cy="0"/>
+        </a:xfrm>
+      </p:grpSpPr>
+      <p:sp>
+        <p:nvSpPr>
+          <p:cNvPr id="2" name="Slide Image Placeholder 1"/>
+          <p:cNvSpPr>
+            <a:spLocks noGrp="1" noRot="1" noChangeAspect="1"/>
+          </p:cNvSpPr>
+          <p:nvPr>
+            <p:ph type="sldImg"/>
+          </p:nvPr>
+        </p:nvSpPr>
+        <p:spPr/>
+      </p:sp>
+      <p:sp>
+        <p:nvSpPr>
+          <p:cNvPr id="3" name="Notes Placeholder 2"/>
+          <p:cNvSpPr>
+            <a:spLocks noGrp="1"/>
+          </p:cNvSpPr>
+          <p:nvPr>
+            <p:ph type="body" idx="1"/>
+          </p:nvPr>
+        </p:nvSpPr>
+        <p:spPr/>
+        <p:txBody>
+          <a:bodyPr/>
+          <a:lstStyle/>
+          <a:p>
+            <a:r>
+              <a:rPr lang="en-US" dirty="0"/>
+              <a:t/>
+            </a:r>
+            <a:endParaRPr lang="en-US" dirty="0"/>
+          </a:p>
+        </p:txBody>
+      </p:sp>
+      <p:sp>
+        <p:nvSpPr>
+          <p:cNvPr id="4" name="Slide Number Placeholder 3"/>
+          <p:cNvSpPr>
+            <a:spLocks noGrp="1"/>
+          </p:cNvSpPr>
+          <p:nvPr>
+            <p:ph type="sldNum" sz="quarter" idx="10"/>
+          </p:nvPr>
+        </p:nvSpPr>
+        <p:spPr/>
+        <p:txBody>
+          <a:bodyPr/>
+          <a:lstStyle/>
+          <a:p>
+            <a:fld id="{F7021451-1387-4CA6-816F-3879F97B5CBC}" type="slidenum">
+              <a:rPr lang="en-US"/>
+              <a:t>47</a:t>
             </a:fld>
             <a:endParaRPr lang="en-US"/>
           </a:p>
@@ -18124,11 +18302,11 @@
         <p:spPr>
           <a:xfrm>
             <a:off x="777240" y="2011680"/>
-            <a:ext cx="6766560" cy="3108960"/>
+            <a:ext cx="6766560" cy="2235708"/>
           </a:xfrm>
           <a:prstGeom prst="roundRect">
             <a:avLst>
-              <a:gd name="adj" fmla="val 2941"/>
+              <a:gd name="adj" fmla="val 4090"/>
             </a:avLst>
           </a:prstGeom>
           <a:solidFill>
@@ -18146,7 +18324,7 @@
         <p:spPr>
           <a:xfrm>
             <a:off x="1088136" y="2322576"/>
-            <a:ext cx="6217920" cy="2560320"/>
+            <a:ext cx="6217920" cy="1687068"/>
           </a:xfrm>
           <a:prstGeom prst="rect">
             <a:avLst/>
@@ -18160,7 +18338,7 @@
           <a:p>
             <a:pPr indent="0" marL="0">
               <a:lnSpc>
-                <a:spcPts val="2100"/>
+                <a:spcPts val="2070"/>
               </a:lnSpc>
               <a:buNone/>
             </a:pPr>
@@ -18180,7 +18358,7 @@
           <a:p>
             <a:pPr indent="0" marL="0">
               <a:lnSpc>
-                <a:spcPts val="2100"/>
+                <a:spcPts val="2070"/>
               </a:lnSpc>
               <a:buNone/>
             </a:pPr>
@@ -18200,7 +18378,7 @@
           <a:p>
             <a:pPr indent="0" marL="0">
               <a:lnSpc>
-                <a:spcPts val="2100"/>
+                <a:spcPts val="2070"/>
               </a:lnSpc>
               <a:buNone/>
             </a:pPr>
@@ -18220,7 +18398,7 @@
           <a:p>
             <a:pPr indent="0" marL="0">
               <a:lnSpc>
-                <a:spcPts val="2100"/>
+                <a:spcPts val="2070"/>
               </a:lnSpc>
               <a:buNone/>
             </a:pPr>
@@ -18229,7 +18407,7 @@
           <a:p>
             <a:pPr indent="0" marL="0">
               <a:lnSpc>
-                <a:spcPts val="2100"/>
+                <a:spcPts val="2070"/>
               </a:lnSpc>
               <a:buNone/>
             </a:pPr>
@@ -18249,7 +18427,7 @@
           <a:p>
             <a:pPr indent="0" marL="0">
               <a:lnSpc>
-                <a:spcPts val="2100"/>
+                <a:spcPts val="2070"/>
               </a:lnSpc>
               <a:buNone/>
             </a:pPr>
@@ -18277,11 +18455,11 @@
         <p:spPr>
           <a:xfrm>
             <a:off x="7863840" y="2011680"/>
-            <a:ext cx="3550615" cy="3108960"/>
+            <a:ext cx="3550615" cy="2235708"/>
           </a:xfrm>
           <a:prstGeom prst="roundRect">
             <a:avLst>
-              <a:gd name="adj" fmla="val 2941"/>
+              <a:gd name="adj" fmla="val 4090"/>
             </a:avLst>
           </a:prstGeom>
           <a:solidFill>
@@ -19594,7 +19772,7 @@
     <p:bg>
       <p:bgPr>
         <a:solidFill>
-          <a:srgbClr val="16181D"/>
+          <a:srgbClr val="FFFFFF"/>
         </a:solidFill>
       </p:bgPr>
     </p:bg>
@@ -19614,219 +19792,17 @@
       </p:grpSpPr>
       <p:sp>
         <p:nvSpPr>
-          <p:cNvPr id="2" name="Text 0"/>
-          <p:cNvSpPr/>
-          <p:nvPr/>
-        </p:nvSpPr>
-        <p:spPr>
-          <a:xfrm>
-            <a:off x="777240" y="2148840"/>
-            <a:ext cx="3657600" cy="365760"/>
-          </a:xfrm>
-          <a:prstGeom prst="rect">
-            <a:avLst/>
-          </a:prstGeom>
-          <a:noFill/>
-          <a:ln/>
-        </p:spPr>
-        <p:txBody>
-          <a:bodyPr wrap="square" lIns="0" tIns="0" rIns="0" bIns="0" rtlCol="0" anchor="ctr"/>
-          <a:lstStyle/>
-          <a:p>
-            <a:pPr indent="0" marL="0">
-              <a:buNone/>
-            </a:pPr>
-            <a:r>
-              <a:rPr lang="en-US" sz="1500" b="1" spc="400" kern="0" dirty="0">
-                <a:solidFill>
-                  <a:srgbClr val="9AA0A6"/>
-                </a:solidFill>
-                <a:latin typeface="Arial" pitchFamily="34" charset="0"/>
-                <a:ea typeface="Arial" pitchFamily="34" charset="-122"/>
-                <a:cs typeface="Arial" pitchFamily="34" charset="-120"/>
-              </a:rPr>
-              <a:t>ROUND</a:t>
-            </a:r>
-            <a:endParaRPr lang="en-US" sz="1500" dirty="0"/>
-          </a:p>
-        </p:txBody>
-      </p:sp>
-      <p:sp>
-        <p:nvSpPr>
-          <p:cNvPr id="3" name="Text 1"/>
-          <p:cNvSpPr/>
-          <p:nvPr/>
-        </p:nvSpPr>
-        <p:spPr>
-          <a:xfrm>
-            <a:off x="685800" y="2240280"/>
-            <a:ext cx="2011680" cy="2286000"/>
-          </a:xfrm>
-          <a:prstGeom prst="rect">
-            <a:avLst/>
-          </a:prstGeom>
-          <a:noFill/>
-          <a:ln/>
-        </p:spPr>
-        <p:txBody>
-          <a:bodyPr wrap="square" lIns="0" tIns="0" rIns="0" bIns="0" rtlCol="0" anchor="ctr"/>
-          <a:lstStyle/>
-          <a:p>
-            <a:pPr indent="0" marL="0">
-              <a:buNone/>
-            </a:pPr>
-            <a:r>
-              <a:rPr lang="en-US" sz="12000" b="1" dirty="0">
-                <a:solidFill>
-                  <a:srgbClr val="EE4B2B"/>
-                </a:solidFill>
-                <a:latin typeface="Arial" pitchFamily="34" charset="0"/>
-                <a:ea typeface="Arial" pitchFamily="34" charset="-122"/>
-                <a:cs typeface="Arial" pitchFamily="34" charset="-120"/>
-              </a:rPr>
-              <a:t>3</a:t>
-            </a:r>
-            <a:endParaRPr lang="en-US" sz="12000" dirty="0"/>
-          </a:p>
-        </p:txBody>
-      </p:sp>
-      <p:sp>
-        <p:nvSpPr>
-          <p:cNvPr id="4" name="Text 2"/>
-          <p:cNvSpPr/>
-          <p:nvPr/>
-        </p:nvSpPr>
-        <p:spPr>
-          <a:xfrm>
-            <a:off x="2697480" y="2651760"/>
-            <a:ext cx="7772400" cy="822960"/>
-          </a:xfrm>
-          <a:prstGeom prst="rect">
-            <a:avLst/>
-          </a:prstGeom>
-          <a:noFill/>
-          <a:ln/>
-        </p:spPr>
-        <p:txBody>
-          <a:bodyPr wrap="square" lIns="0" tIns="0" rIns="0" bIns="0" rtlCol="0" anchor="ctr"/>
-          <a:lstStyle/>
-          <a:p>
-            <a:pPr indent="0" marL="0">
-              <a:buNone/>
-            </a:pPr>
-            <a:r>
-              <a:rPr lang="en-US" sz="4400" b="1" dirty="0">
-                <a:solidFill>
-                  <a:srgbClr val="FFFFFF"/>
-                </a:solidFill>
-                <a:latin typeface="Arial" pitchFamily="34" charset="0"/>
-                <a:ea typeface="Arial" pitchFamily="34" charset="-122"/>
-                <a:cs typeface="Arial" pitchFamily="34" charset="-120"/>
-              </a:rPr>
-              <a:t>다음 주 시연</a:t>
-            </a:r>
-            <a:endParaRPr lang="en-US" sz="4400" dirty="0"/>
-          </a:p>
-        </p:txBody>
-      </p:sp>
-      <p:sp>
-        <p:nvSpPr>
-          <p:cNvPr id="5" name="Text 3"/>
-          <p:cNvSpPr/>
-          <p:nvPr/>
-        </p:nvSpPr>
-        <p:spPr>
-          <a:xfrm>
-            <a:off x="2743200" y="3520440"/>
-            <a:ext cx="7772400" cy="457200"/>
-          </a:xfrm>
-          <a:prstGeom prst="rect">
-            <a:avLst/>
-          </a:prstGeom>
-          <a:noFill/>
-          <a:ln/>
-        </p:spPr>
-        <p:txBody>
-          <a:bodyPr wrap="square" lIns="0" tIns="0" rIns="0" bIns="0" rtlCol="0" anchor="ctr"/>
-          <a:lstStyle/>
-          <a:p>
-            <a:pPr indent="0" marL="0">
-              <a:buNone/>
-            </a:pPr>
-            <a:r>
-              <a:rPr lang="en-US" sz="1500" dirty="0">
-                <a:solidFill>
-                  <a:srgbClr val="9AA0A6"/>
-                </a:solidFill>
-                <a:latin typeface="Arial" pitchFamily="34" charset="0"/>
-                <a:ea typeface="Arial" pitchFamily="34" charset="-122"/>
-                <a:cs typeface="Arial" pitchFamily="34" charset="-120"/>
-              </a:rPr>
-              <a:t>3분 · 팀 미션 발제</a:t>
-            </a:r>
-            <a:endParaRPr lang="en-US" sz="1500" dirty="0"/>
-          </a:p>
-        </p:txBody>
-      </p:sp>
-      <p:sp>
-        <p:nvSpPr>
-          <p:cNvPr id="6" name="Shape 4"/>
-          <p:cNvSpPr/>
-          <p:nvPr/>
-        </p:nvSpPr>
-        <p:spPr>
-          <a:xfrm>
-            <a:off x="777240" y="4983480"/>
-            <a:ext cx="109728" cy="274320"/>
-          </a:xfrm>
-          <a:prstGeom prst="roundRect">
-            <a:avLst>
-              <a:gd name="adj" fmla="val 41667"/>
-            </a:avLst>
-          </a:prstGeom>
-          <a:solidFill>
-            <a:srgbClr val="3A3E45"/>
-          </a:solidFill>
-          <a:ln/>
-        </p:spPr>
-      </p:sp>
-      <p:sp>
-        <p:nvSpPr>
-          <p:cNvPr id="7" name="Shape 5"/>
-          <p:cNvSpPr/>
-          <p:nvPr/>
-        </p:nvSpPr>
-        <p:spPr>
-          <a:xfrm>
-            <a:off x="1051560" y="4754880"/>
-            <a:ext cx="109728" cy="731520"/>
-          </a:xfrm>
-          <a:prstGeom prst="roundRect">
-            <a:avLst>
-              <a:gd name="adj" fmla="val 41667"/>
-            </a:avLst>
-          </a:prstGeom>
-          <a:solidFill>
-            <a:srgbClr val="3A3E45"/>
-          </a:solidFill>
-          <a:ln/>
-        </p:spPr>
-      </p:sp>
-      <p:sp>
-        <p:nvSpPr>
-          <p:cNvPr id="8" name="Shape 6"/>
-          <p:cNvSpPr/>
-          <p:nvPr/>
-        </p:nvSpPr>
-        <p:spPr>
-          <a:xfrm>
-            <a:off x="1325880" y="4480560"/>
-            <a:ext cx="109728" cy="1280160"/>
-          </a:xfrm>
-          <a:prstGeom prst="roundRect">
-            <a:avLst>
-              <a:gd name="adj" fmla="val 41667"/>
-            </a:avLst>
+          <p:cNvPr id="2" name="Shape 0"/>
+          <p:cNvSpPr/>
+          <p:nvPr/>
+        </p:nvSpPr>
+        <p:spPr>
+          <a:xfrm>
+            <a:off x="777240" y="621792"/>
+            <a:ext cx="91440" cy="91440"/>
+          </a:xfrm>
+          <a:prstGeom prst="ellipse">
+            <a:avLst/>
           </a:prstGeom>
           <a:solidFill>
             <a:srgbClr val="EE4B2B"/>
@@ -19836,205 +19812,697 @@
       </p:sp>
       <p:sp>
         <p:nvSpPr>
-          <p:cNvPr id="9" name="Shape 7"/>
-          <p:cNvSpPr/>
-          <p:nvPr/>
-        </p:nvSpPr>
-        <p:spPr>
-          <a:xfrm>
-            <a:off x="1600200" y="4709160"/>
-            <a:ext cx="109728" cy="822960"/>
+          <p:cNvPr id="3" name="Text 1"/>
+          <p:cNvSpPr/>
+          <p:nvPr/>
+        </p:nvSpPr>
+        <p:spPr>
+          <a:xfrm>
+            <a:off x="960120" y="530352"/>
+            <a:ext cx="8229600" cy="274320"/>
+          </a:xfrm>
+          <a:prstGeom prst="rect">
+            <a:avLst/>
+          </a:prstGeom>
+          <a:noFill/>
+          <a:ln/>
+        </p:spPr>
+        <p:txBody>
+          <a:bodyPr wrap="square" lIns="0" tIns="0" rIns="0" bIns="0" rtlCol="0" anchor="ctr"/>
+          <a:lstStyle/>
+          <a:p>
+            <a:pPr indent="0" marL="0">
+              <a:buNone/>
+            </a:pPr>
+            <a:r>
+              <a:rPr lang="en-US" sz="1100" b="1" spc="250" kern="0" dirty="0">
+                <a:solidFill>
+                  <a:srgbClr val="EE4B2B"/>
+                </a:solidFill>
+                <a:latin typeface="Arial" pitchFamily="34" charset="0"/>
+                <a:ea typeface="Arial" pitchFamily="34" charset="-122"/>
+                <a:cs typeface="Arial" pitchFamily="34" charset="-120"/>
+              </a:rPr>
+              <a:t>CASE, CLAPPING DETECTION</a:t>
+            </a:r>
+            <a:endParaRPr lang="en-US" sz="1100" dirty="0"/>
+          </a:p>
+        </p:txBody>
+      </p:sp>
+      <p:sp>
+        <p:nvSpPr>
+          <p:cNvPr id="4" name="Text 2"/>
+          <p:cNvSpPr/>
+          <p:nvPr/>
+        </p:nvSpPr>
+        <p:spPr>
+          <a:xfrm>
+            <a:off x="777240" y="896112"/>
+            <a:ext cx="10637215" cy="548640"/>
+          </a:xfrm>
+          <a:prstGeom prst="rect">
+            <a:avLst/>
+          </a:prstGeom>
+          <a:noFill/>
+          <a:ln/>
+        </p:spPr>
+        <p:txBody>
+          <a:bodyPr wrap="square" lIns="0" tIns="0" rIns="0" bIns="0" rtlCol="0" anchor="ctr"/>
+          <a:lstStyle/>
+          <a:p>
+            <a:pPr indent="0" marL="0">
+              <a:buNone/>
+            </a:pPr>
+            <a:r>
+              <a:rPr lang="en-US" sz="3000" b="1" dirty="0">
+                <a:solidFill>
+                  <a:srgbClr val="16181D"/>
+                </a:solidFill>
+                <a:latin typeface="Arial" pitchFamily="34" charset="0"/>
+                <a:ea typeface="Arial" pitchFamily="34" charset="-122"/>
+                <a:cs typeface="Arial" pitchFamily="34" charset="-120"/>
+              </a:rPr>
+              <a:t>박수 감지 하나를 끝까지 따라가 봅니다</a:t>
+            </a:r>
+            <a:endParaRPr lang="en-US" sz="3000" dirty="0"/>
+          </a:p>
+        </p:txBody>
+      </p:sp>
+      <p:sp>
+        <p:nvSpPr>
+          <p:cNvPr id="5" name="Shape 3"/>
+          <p:cNvSpPr/>
+          <p:nvPr/>
+        </p:nvSpPr>
+        <p:spPr>
+          <a:xfrm>
+            <a:off x="777240" y="1874520"/>
+            <a:ext cx="2467280" cy="3017520"/>
           </a:xfrm>
           <a:prstGeom prst="roundRect">
             <a:avLst>
-              <a:gd name="adj" fmla="val 41667"/>
+              <a:gd name="adj" fmla="val 3706"/>
             </a:avLst>
           </a:prstGeom>
           <a:solidFill>
-            <a:srgbClr val="3A3E45"/>
+            <a:srgbClr val="F1F1F3"/>
           </a:solidFill>
           <a:ln/>
         </p:spPr>
       </p:sp>
       <p:sp>
         <p:nvSpPr>
-          <p:cNvPr id="10" name="Shape 8"/>
-          <p:cNvSpPr/>
-          <p:nvPr/>
-        </p:nvSpPr>
-        <p:spPr>
-          <a:xfrm>
-            <a:off x="1874520" y="4297680"/>
-            <a:ext cx="109728" cy="1645920"/>
+          <p:cNvPr id="6" name="Text 4"/>
+          <p:cNvSpPr/>
+          <p:nvPr/>
+        </p:nvSpPr>
+        <p:spPr>
+          <a:xfrm>
+            <a:off x="1069848" y="2203704"/>
+            <a:ext cx="1882064" cy="237744"/>
+          </a:xfrm>
+          <a:prstGeom prst="rect">
+            <a:avLst/>
+          </a:prstGeom>
+          <a:noFill/>
+          <a:ln/>
+        </p:spPr>
+        <p:txBody>
+          <a:bodyPr wrap="square" lIns="0" tIns="0" rIns="0" bIns="0" rtlCol="0" anchor="ctr"/>
+          <a:lstStyle/>
+          <a:p>
+            <a:pPr indent="0" marL="0">
+              <a:buNone/>
+            </a:pPr>
+            <a:r>
+              <a:rPr lang="en-US" sz="1100" b="1" spc="100" kern="0" dirty="0">
+                <a:solidFill>
+                  <a:srgbClr val="D23A1C"/>
+                </a:solidFill>
+                <a:latin typeface="Arial" pitchFamily="34" charset="0"/>
+                <a:ea typeface="Arial" pitchFamily="34" charset="-122"/>
+                <a:cs typeface="Arial" pitchFamily="34" charset="-120"/>
+              </a:rPr>
+              <a:t>1, 무엇을 잡을까</a:t>
+            </a:r>
+            <a:endParaRPr lang="en-US" sz="1100" dirty="0"/>
+          </a:p>
+        </p:txBody>
+      </p:sp>
+      <p:sp>
+        <p:nvSpPr>
+          <p:cNvPr id="7" name="Text 5"/>
+          <p:cNvSpPr/>
+          <p:nvPr/>
+        </p:nvSpPr>
+        <p:spPr>
+          <a:xfrm>
+            <a:off x="1069848" y="2532888"/>
+            <a:ext cx="1882064" cy="457200"/>
+          </a:xfrm>
+          <a:prstGeom prst="rect">
+            <a:avLst/>
+          </a:prstGeom>
+          <a:noFill/>
+          <a:ln/>
+        </p:spPr>
+        <p:txBody>
+          <a:bodyPr wrap="square" lIns="0" tIns="0" rIns="0" bIns="0" rtlCol="0" anchor="t"/>
+          <a:lstStyle/>
+          <a:p>
+            <a:pPr indent="0" marL="0">
+              <a:buNone/>
+            </a:pPr>
+            <a:r>
+              <a:rPr lang="en-US" sz="1700" b="1" dirty="0">
+                <a:solidFill>
+                  <a:srgbClr val="16181D"/>
+                </a:solidFill>
+                <a:latin typeface="Arial" pitchFamily="34" charset="0"/>
+                <a:ea typeface="Arial" pitchFamily="34" charset="-122"/>
+                <a:cs typeface="Arial" pitchFamily="34" charset="-120"/>
+              </a:rPr>
+              <a:t>clapping</a:t>
+            </a:r>
+            <a:endParaRPr lang="en-US" sz="1700" dirty="0"/>
+          </a:p>
+        </p:txBody>
+      </p:sp>
+      <p:sp>
+        <p:nvSpPr>
+          <p:cNvPr id="8" name="Text 6"/>
+          <p:cNvSpPr/>
+          <p:nvPr/>
+        </p:nvSpPr>
+        <p:spPr>
+          <a:xfrm>
+            <a:off x="1069848" y="3099816"/>
+            <a:ext cx="1882064" cy="1536192"/>
+          </a:xfrm>
+          <a:prstGeom prst="rect">
+            <a:avLst/>
+          </a:prstGeom>
+          <a:noFill/>
+          <a:ln/>
+        </p:spPr>
+        <p:txBody>
+          <a:bodyPr wrap="square" lIns="0" tIns="0" rIns="0" bIns="0" rtlCol="0" anchor="t"/>
+          <a:lstStyle/>
+          <a:p>
+            <a:pPr indent="0" marL="0">
+              <a:lnSpc>
+                <a:spcPts val="1900"/>
+              </a:lnSpc>
+              <a:buNone/>
+            </a:pPr>
+            <a:r>
+              <a:rPr lang="en-US" sz="1250" dirty="0">
+                <a:solidFill>
+                  <a:srgbClr val="6E7278"/>
+                </a:solidFill>
+                <a:latin typeface="Arial" pitchFamily="34" charset="0"/>
+                <a:ea typeface="Arial" pitchFamily="34" charset="-122"/>
+                <a:cs typeface="Arial" pitchFamily="34" charset="-120"/>
+              </a:rPr>
+              <a:t>내장 분류기가 이미 아는 레이블입니다. applause도 같이 인정하면 한 명이 치든 다 같이 치든 잡힙니다.</a:t>
+            </a:r>
+            <a:endParaRPr lang="en-US" sz="1250" dirty="0"/>
+          </a:p>
+        </p:txBody>
+      </p:sp>
+      <p:sp>
+        <p:nvSpPr>
+          <p:cNvPr id="9" name="Shape 7"/>
+          <p:cNvSpPr/>
+          <p:nvPr/>
+        </p:nvSpPr>
+        <p:spPr>
+          <a:xfrm>
+            <a:off x="3500552" y="1874520"/>
+            <a:ext cx="2467280" cy="3017520"/>
           </a:xfrm>
           <a:prstGeom prst="roundRect">
             <a:avLst>
-              <a:gd name="adj" fmla="val 41667"/>
+              <a:gd name="adj" fmla="val 3706"/>
             </a:avLst>
           </a:prstGeom>
           <a:solidFill>
-            <a:srgbClr val="3A3E45"/>
+            <a:srgbClr val="F1F1F3"/>
           </a:solidFill>
           <a:ln/>
         </p:spPr>
       </p:sp>
       <p:sp>
         <p:nvSpPr>
-          <p:cNvPr id="11" name="Shape 9"/>
-          <p:cNvSpPr/>
-          <p:nvPr/>
-        </p:nvSpPr>
-        <p:spPr>
-          <a:xfrm>
-            <a:off x="2148840" y="4572000"/>
-            <a:ext cx="109728" cy="1097280"/>
+          <p:cNvPr id="10" name="Text 8"/>
+          <p:cNvSpPr/>
+          <p:nvPr/>
+        </p:nvSpPr>
+        <p:spPr>
+          <a:xfrm>
+            <a:off x="3793160" y="2203704"/>
+            <a:ext cx="1882064" cy="237744"/>
+          </a:xfrm>
+          <a:prstGeom prst="rect">
+            <a:avLst/>
+          </a:prstGeom>
+          <a:noFill/>
+          <a:ln/>
+        </p:spPr>
+        <p:txBody>
+          <a:bodyPr wrap="square" lIns="0" tIns="0" rIns="0" bIns="0" rtlCol="0" anchor="ctr"/>
+          <a:lstStyle/>
+          <a:p>
+            <a:pPr indent="0" marL="0">
+              <a:buNone/>
+            </a:pPr>
+            <a:r>
+              <a:rPr lang="en-US" sz="1100" b="1" spc="100" kern="0" dirty="0">
+                <a:solidFill>
+                  <a:srgbClr val="D23A1C"/>
+                </a:solidFill>
+                <a:latin typeface="Arial" pitchFamily="34" charset="0"/>
+                <a:ea typeface="Arial" pitchFamily="34" charset="-122"/>
+                <a:cs typeface="Arial" pitchFamily="34" charset="-120"/>
+              </a:rPr>
+              <a:t>2, 윈도를 줄인다</a:t>
+            </a:r>
+            <a:endParaRPr lang="en-US" sz="1100" dirty="0"/>
+          </a:p>
+        </p:txBody>
+      </p:sp>
+      <p:sp>
+        <p:nvSpPr>
+          <p:cNvPr id="11" name="Text 9"/>
+          <p:cNvSpPr/>
+          <p:nvPr/>
+        </p:nvSpPr>
+        <p:spPr>
+          <a:xfrm>
+            <a:off x="3793160" y="2532888"/>
+            <a:ext cx="1882064" cy="457200"/>
+          </a:xfrm>
+          <a:prstGeom prst="rect">
+            <a:avLst/>
+          </a:prstGeom>
+          <a:noFill/>
+          <a:ln/>
+        </p:spPr>
+        <p:txBody>
+          <a:bodyPr wrap="square" lIns="0" tIns="0" rIns="0" bIns="0" rtlCol="0" anchor="t"/>
+          <a:lstStyle/>
+          <a:p>
+            <a:pPr indent="0" marL="0">
+              <a:buNone/>
+            </a:pPr>
+            <a:r>
+              <a:rPr lang="en-US" sz="1700" b="1" dirty="0">
+                <a:solidFill>
+                  <a:srgbClr val="16181D"/>
+                </a:solidFill>
+                <a:latin typeface="Arial" pitchFamily="34" charset="0"/>
+                <a:ea typeface="Arial" pitchFamily="34" charset="-122"/>
+                <a:cs typeface="Arial" pitchFamily="34" charset="-120"/>
+              </a:rPr>
+              <a:t>1.5초 → 0.75초</a:t>
+            </a:r>
+            <a:endParaRPr lang="en-US" sz="1700" dirty="0"/>
+          </a:p>
+        </p:txBody>
+      </p:sp>
+      <p:sp>
+        <p:nvSpPr>
+          <p:cNvPr id="12" name="Text 10"/>
+          <p:cNvSpPr/>
+          <p:nvPr/>
+        </p:nvSpPr>
+        <p:spPr>
+          <a:xfrm>
+            <a:off x="3793160" y="3099816"/>
+            <a:ext cx="1882064" cy="1536192"/>
+          </a:xfrm>
+          <a:prstGeom prst="rect">
+            <a:avLst/>
+          </a:prstGeom>
+          <a:noFill/>
+          <a:ln/>
+        </p:spPr>
+        <p:txBody>
+          <a:bodyPr wrap="square" lIns="0" tIns="0" rIns="0" bIns="0" rtlCol="0" anchor="t"/>
+          <a:lstStyle/>
+          <a:p>
+            <a:pPr indent="0" marL="0">
+              <a:lnSpc>
+                <a:spcPts val="1900"/>
+              </a:lnSpc>
+              <a:buNone/>
+            </a:pPr>
+            <a:r>
+              <a:rPr lang="en-US" sz="1250" dirty="0">
+                <a:solidFill>
+                  <a:srgbClr val="6E7278"/>
+                </a:solidFill>
+                <a:latin typeface="Arial" pitchFamily="34" charset="0"/>
+                <a:ea typeface="Arial" pitchFamily="34" charset="-122"/>
+                <a:cs typeface="Arial" pitchFamily="34" charset="-120"/>
+              </a:rPr>
+              <a:t>박수는 0.1초짜리 소리입니다. 3초 윈도 안에서는 주변 소음에 묻혀 확률이 오르지 않습니다.</a:t>
+            </a:r>
+            <a:endParaRPr lang="en-US" sz="1250" dirty="0"/>
+          </a:p>
+        </p:txBody>
+      </p:sp>
+      <p:sp>
+        <p:nvSpPr>
+          <p:cNvPr id="13" name="Shape 11"/>
+          <p:cNvSpPr/>
+          <p:nvPr/>
+        </p:nvSpPr>
+        <p:spPr>
+          <a:xfrm>
+            <a:off x="6223864" y="1874520"/>
+            <a:ext cx="2467280" cy="3017520"/>
           </a:xfrm>
           <a:prstGeom prst="roundRect">
             <a:avLst>
-              <a:gd name="adj" fmla="val 41667"/>
+              <a:gd name="adj" fmla="val 3706"/>
             </a:avLst>
           </a:prstGeom>
           <a:solidFill>
-            <a:srgbClr val="3A3E45"/>
+            <a:srgbClr val="FDEAE5"/>
           </a:solidFill>
-          <a:ln/>
-        </p:spPr>
-      </p:sp>
-      <p:sp>
-        <p:nvSpPr>
-          <p:cNvPr id="12" name="Shape 10"/>
-          <p:cNvSpPr/>
-          <p:nvPr/>
-        </p:nvSpPr>
-        <p:spPr>
-          <a:xfrm>
-            <a:off x="2423160" y="4846320"/>
-            <a:ext cx="109728" cy="548640"/>
+          <a:ln w="15875">
+            <a:solidFill>
+              <a:srgbClr val="EE4B2B"/>
+            </a:solidFill>
+            <a:prstDash val="solid"/>
+          </a:ln>
+        </p:spPr>
+      </p:sp>
+      <p:sp>
+        <p:nvSpPr>
+          <p:cNvPr id="14" name="Text 12"/>
+          <p:cNvSpPr/>
+          <p:nvPr/>
+        </p:nvSpPr>
+        <p:spPr>
+          <a:xfrm>
+            <a:off x="6516472" y="2203704"/>
+            <a:ext cx="1882064" cy="237744"/>
+          </a:xfrm>
+          <a:prstGeom prst="rect">
+            <a:avLst/>
+          </a:prstGeom>
+          <a:noFill/>
+          <a:ln/>
+        </p:spPr>
+        <p:txBody>
+          <a:bodyPr wrap="square" lIns="0" tIns="0" rIns="0" bIns="0" rtlCol="0" anchor="ctr"/>
+          <a:lstStyle/>
+          <a:p>
+            <a:pPr indent="0" marL="0">
+              <a:buNone/>
+            </a:pPr>
+            <a:r>
+              <a:rPr lang="en-US" sz="1100" b="1" spc="100" kern="0" dirty="0">
+                <a:solidFill>
+                  <a:srgbClr val="D23A1C"/>
+                </a:solidFill>
+                <a:latin typeface="Arial" pitchFamily="34" charset="0"/>
+                <a:ea typeface="Arial" pitchFamily="34" charset="-122"/>
+                <a:cs typeface="Arial" pitchFamily="34" charset="-120"/>
+              </a:rPr>
+              <a:t>3, 임계값을 정한다</a:t>
+            </a:r>
+            <a:endParaRPr lang="en-US" sz="1100" dirty="0"/>
+          </a:p>
+        </p:txBody>
+      </p:sp>
+      <p:sp>
+        <p:nvSpPr>
+          <p:cNvPr id="15" name="Text 13"/>
+          <p:cNvSpPr/>
+          <p:nvPr/>
+        </p:nvSpPr>
+        <p:spPr>
+          <a:xfrm>
+            <a:off x="6516472" y="2532888"/>
+            <a:ext cx="1882064" cy="457200"/>
+          </a:xfrm>
+          <a:prstGeom prst="rect">
+            <a:avLst/>
+          </a:prstGeom>
+          <a:noFill/>
+          <a:ln/>
+        </p:spPr>
+        <p:txBody>
+          <a:bodyPr wrap="square" lIns="0" tIns="0" rIns="0" bIns="0" rtlCol="0" anchor="t"/>
+          <a:lstStyle/>
+          <a:p>
+            <a:pPr indent="0" marL="0">
+              <a:buNone/>
+            </a:pPr>
+            <a:r>
+              <a:rPr lang="en-US" sz="1700" b="1" dirty="0">
+                <a:solidFill>
+                  <a:srgbClr val="16181D"/>
+                </a:solidFill>
+                <a:latin typeface="Arial" pitchFamily="34" charset="0"/>
+                <a:ea typeface="Arial" pitchFamily="34" charset="-122"/>
+                <a:cs typeface="Arial" pitchFamily="34" charset="-120"/>
+              </a:rPr>
+              <a:t>0.45</a:t>
+            </a:r>
+            <a:endParaRPr lang="en-US" sz="1700" dirty="0"/>
+          </a:p>
+        </p:txBody>
+      </p:sp>
+      <p:sp>
+        <p:nvSpPr>
+          <p:cNvPr id="16" name="Text 14"/>
+          <p:cNvSpPr/>
+          <p:nvPr/>
+        </p:nvSpPr>
+        <p:spPr>
+          <a:xfrm>
+            <a:off x="6516472" y="3099816"/>
+            <a:ext cx="1882064" cy="1536192"/>
+          </a:xfrm>
+          <a:prstGeom prst="rect">
+            <a:avLst/>
+          </a:prstGeom>
+          <a:noFill/>
+          <a:ln/>
+        </p:spPr>
+        <p:txBody>
+          <a:bodyPr wrap="square" lIns="0" tIns="0" rIns="0" bIns="0" rtlCol="0" anchor="t"/>
+          <a:lstStyle/>
+          <a:p>
+            <a:pPr indent="0" marL="0">
+              <a:lnSpc>
+                <a:spcPts val="1900"/>
+              </a:lnSpc>
+              <a:buNone/>
+            </a:pPr>
+            <a:r>
+              <a:rPr lang="en-US" sz="1250" dirty="0">
+                <a:solidFill>
+                  <a:srgbClr val="6E7278"/>
+                </a:solidFill>
+                <a:latin typeface="Arial" pitchFamily="34" charset="0"/>
+                <a:ea typeface="Arial" pitchFamily="34" charset="-122"/>
+                <a:cs typeface="Arial" pitchFamily="34" charset="-120"/>
+              </a:rPr>
+              <a:t>한 번의 박수로도 넘도록 낮게 잡았습니다. 오탐이 늘면 올리고, 연속 판정을 함께 겁니다.</a:t>
+            </a:r>
+            <a:endParaRPr lang="en-US" sz="1250" dirty="0"/>
+          </a:p>
+        </p:txBody>
+      </p:sp>
+      <p:sp>
+        <p:nvSpPr>
+          <p:cNvPr id="17" name="Shape 15"/>
+          <p:cNvSpPr/>
+          <p:nvPr/>
+        </p:nvSpPr>
+        <p:spPr>
+          <a:xfrm>
+            <a:off x="8947175" y="1874520"/>
+            <a:ext cx="2467280" cy="3017520"/>
           </a:xfrm>
           <a:prstGeom prst="roundRect">
             <a:avLst>
-              <a:gd name="adj" fmla="val 41667"/>
+              <a:gd name="adj" fmla="val 3706"/>
             </a:avLst>
           </a:prstGeom>
           <a:solidFill>
-            <a:srgbClr val="EE4B2B"/>
+            <a:srgbClr val="F1F1F3"/>
           </a:solidFill>
           <a:ln/>
         </p:spPr>
       </p:sp>
       <p:sp>
         <p:nvSpPr>
-          <p:cNvPr id="13" name="Shape 11"/>
-          <p:cNvSpPr/>
-          <p:nvPr/>
-        </p:nvSpPr>
-        <p:spPr>
-          <a:xfrm>
-            <a:off x="2697480" y="4434840"/>
-            <a:ext cx="109728" cy="1371600"/>
-          </a:xfrm>
-          <a:prstGeom prst="roundRect">
-            <a:avLst>
-              <a:gd name="adj" fmla="val 41667"/>
-            </a:avLst>
-          </a:prstGeom>
-          <a:solidFill>
-            <a:srgbClr val="3A3E45"/>
-          </a:solidFill>
-          <a:ln/>
-        </p:spPr>
-      </p:sp>
-      <p:sp>
-        <p:nvSpPr>
-          <p:cNvPr id="14" name="Shape 12"/>
-          <p:cNvSpPr/>
-          <p:nvPr/>
-        </p:nvSpPr>
-        <p:spPr>
-          <a:xfrm>
-            <a:off x="2971800" y="4709160"/>
-            <a:ext cx="109728" cy="822960"/>
-          </a:xfrm>
-          <a:prstGeom prst="roundRect">
-            <a:avLst>
-              <a:gd name="adj" fmla="val 41667"/>
-            </a:avLst>
-          </a:prstGeom>
-          <a:solidFill>
-            <a:srgbClr val="3A3E45"/>
-          </a:solidFill>
-          <a:ln/>
-        </p:spPr>
-      </p:sp>
-      <p:sp>
-        <p:nvSpPr>
-          <p:cNvPr id="15" name="Shape 13"/>
-          <p:cNvSpPr/>
-          <p:nvPr/>
-        </p:nvSpPr>
-        <p:spPr>
-          <a:xfrm>
-            <a:off x="3246120" y="4937760"/>
-            <a:ext cx="109728" cy="365760"/>
-          </a:xfrm>
-          <a:prstGeom prst="roundRect">
-            <a:avLst>
-              <a:gd name="adj" fmla="val 41667"/>
-            </a:avLst>
-          </a:prstGeom>
-          <a:solidFill>
-            <a:srgbClr val="3A3E45"/>
-          </a:solidFill>
-          <a:ln/>
-        </p:spPr>
-      </p:sp>
-      <p:sp>
-        <p:nvSpPr>
-          <p:cNvPr id="16" name="Shape 14"/>
-          <p:cNvSpPr/>
-          <p:nvPr/>
-        </p:nvSpPr>
-        <p:spPr>
-          <a:xfrm>
-            <a:off x="3520440" y="4617720"/>
-            <a:ext cx="109728" cy="1005840"/>
-          </a:xfrm>
-          <a:prstGeom prst="roundRect">
-            <a:avLst>
-              <a:gd name="adj" fmla="val 41667"/>
-            </a:avLst>
-          </a:prstGeom>
-          <a:solidFill>
-            <a:srgbClr val="EE4B2B"/>
-          </a:solidFill>
-          <a:ln/>
-        </p:spPr>
-      </p:sp>
-      <p:sp>
-        <p:nvSpPr>
-          <p:cNvPr id="17" name="Shape 15"/>
-          <p:cNvSpPr/>
-          <p:nvPr/>
-        </p:nvSpPr>
-        <p:spPr>
-          <a:xfrm>
-            <a:off x="3794760" y="4800600"/>
-            <a:ext cx="109728" cy="640080"/>
-          </a:xfrm>
-          <a:prstGeom prst="roundRect">
-            <a:avLst>
-              <a:gd name="adj" fmla="val 41667"/>
-            </a:avLst>
-          </a:prstGeom>
-          <a:solidFill>
-            <a:srgbClr val="3A3E45"/>
-          </a:solidFill>
-          <a:ln/>
-        </p:spPr>
-      </p:sp>
-      <p:sp>
-        <p:nvSpPr>
           <p:cNvPr id="18" name="Text 16"/>
+          <p:cNvSpPr/>
+          <p:nvPr/>
+        </p:nvSpPr>
+        <p:spPr>
+          <a:xfrm>
+            <a:off x="9239783" y="2203704"/>
+            <a:ext cx="1882064" cy="237744"/>
+          </a:xfrm>
+          <a:prstGeom prst="rect">
+            <a:avLst/>
+          </a:prstGeom>
+          <a:noFill/>
+          <a:ln/>
+        </p:spPr>
+        <p:txBody>
+          <a:bodyPr wrap="square" lIns="0" tIns="0" rIns="0" bIns="0" rtlCol="0" anchor="ctr"/>
+          <a:lstStyle/>
+          <a:p>
+            <a:pPr indent="0" marL="0">
+              <a:buNone/>
+            </a:pPr>
+            <a:r>
+              <a:rPr lang="en-US" sz="1100" b="1" spc="100" kern="0" dirty="0">
+                <a:solidFill>
+                  <a:srgbClr val="D23A1C"/>
+                </a:solidFill>
+                <a:latin typeface="Arial" pitchFamily="34" charset="0"/>
+                <a:ea typeface="Arial" pitchFamily="34" charset="-122"/>
+                <a:cs typeface="Arial" pitchFamily="34" charset="-120"/>
+              </a:rPr>
+              <a:t>4, 무엇에 쓸까</a:t>
+            </a:r>
+            <a:endParaRPr lang="en-US" sz="1100" dirty="0"/>
+          </a:p>
+        </p:txBody>
+      </p:sp>
+      <p:sp>
+        <p:nvSpPr>
+          <p:cNvPr id="19" name="Text 17"/>
+          <p:cNvSpPr/>
+          <p:nvPr/>
+        </p:nvSpPr>
+        <p:spPr>
+          <a:xfrm>
+            <a:off x="9239783" y="2532888"/>
+            <a:ext cx="1882064" cy="457200"/>
+          </a:xfrm>
+          <a:prstGeom prst="rect">
+            <a:avLst/>
+          </a:prstGeom>
+          <a:noFill/>
+          <a:ln/>
+        </p:spPr>
+        <p:txBody>
+          <a:bodyPr wrap="square" lIns="0" tIns="0" rIns="0" bIns="0" rtlCol="0" anchor="t"/>
+          <a:lstStyle/>
+          <a:p>
+            <a:pPr indent="0" marL="0">
+              <a:buNone/>
+            </a:pPr>
+            <a:r>
+              <a:rPr lang="en-US" sz="1700" b="1" dirty="0">
+                <a:solidFill>
+                  <a:srgbClr val="16181D"/>
+                </a:solidFill>
+                <a:latin typeface="Arial" pitchFamily="34" charset="0"/>
+                <a:ea typeface="Arial" pitchFamily="34" charset="-122"/>
+                <a:cs typeface="Arial" pitchFamily="34" charset="-120"/>
+              </a:rPr>
+              <a:t>점수와 진동</a:t>
+            </a:r>
+            <a:endParaRPr lang="en-US" sz="1700" dirty="0"/>
+          </a:p>
+        </p:txBody>
+      </p:sp>
+      <p:sp>
+        <p:nvSpPr>
+          <p:cNvPr id="20" name="Text 18"/>
+          <p:cNvSpPr/>
+          <p:nvPr/>
+        </p:nvSpPr>
+        <p:spPr>
+          <a:xfrm>
+            <a:off x="9239783" y="3099816"/>
+            <a:ext cx="1882064" cy="1536192"/>
+          </a:xfrm>
+          <a:prstGeom prst="rect">
+            <a:avLst/>
+          </a:prstGeom>
+          <a:noFill/>
+          <a:ln/>
+        </p:spPr>
+        <p:txBody>
+          <a:bodyPr wrap="square" lIns="0" tIns="0" rIns="0" bIns="0" rtlCol="0" anchor="t"/>
+          <a:lstStyle/>
+          <a:p>
+            <a:pPr indent="0" marL="0">
+              <a:lnSpc>
+                <a:spcPts val="1900"/>
+              </a:lnSpc>
+              <a:buNone/>
+            </a:pPr>
+            <a:r>
+              <a:rPr lang="en-US" sz="1250" dirty="0">
+                <a:solidFill>
+                  <a:srgbClr val="6E7278"/>
+                </a:solidFill>
+                <a:latin typeface="Arial" pitchFamily="34" charset="0"/>
+                <a:ea typeface="Arial" pitchFamily="34" charset="-122"/>
+                <a:cs typeface="Arial" pitchFamily="34" charset="-120"/>
+              </a:rPr>
+              <a:t>SoundHook은 성공 처리와 햅틱으로 씁니다. 여러분 앱에서는 화면 전환이나 카운트가 되겠지요.</a:t>
+            </a:r>
+            <a:endParaRPr lang="en-US" sz="1250" dirty="0"/>
+          </a:p>
+        </p:txBody>
+      </p:sp>
+      <p:sp>
+        <p:nvSpPr>
+          <p:cNvPr id="21" name="Text 19"/>
+          <p:cNvSpPr/>
+          <p:nvPr/>
+        </p:nvSpPr>
+        <p:spPr>
+          <a:xfrm>
+            <a:off x="777240" y="5166360"/>
+            <a:ext cx="10637215" cy="457200"/>
+          </a:xfrm>
+          <a:prstGeom prst="rect">
+            <a:avLst/>
+          </a:prstGeom>
+          <a:noFill/>
+          <a:ln/>
+        </p:spPr>
+        <p:txBody>
+          <a:bodyPr wrap="square" lIns="0" tIns="0" rIns="0" bIns="0" rtlCol="0" anchor="t"/>
+          <a:lstStyle/>
+          <a:p>
+            <a:pPr indent="0" marL="0">
+              <a:buNone/>
+            </a:pPr>
+            <a:r>
+              <a:rPr lang="en-US" sz="1300" b="1" dirty="0">
+                <a:solidFill>
+                  <a:srgbClr val="D23A1C"/>
+                </a:solidFill>
+                <a:latin typeface="Arial" pitchFamily="34" charset="0"/>
+                <a:ea typeface="Arial" pitchFamily="34" charset="-122"/>
+                <a:cs typeface="Arial" pitchFamily="34" charset="-120"/>
+              </a:rPr>
+              <a:t>레이블 하나를 고르고, 윈도를 맞추고, 임계값을 정하는 것. 사운드 기능 하나는 이 세 줄이 전부입니다.</a:t>
+            </a:r>
+            <a:endParaRPr lang="en-US" sz="1300" dirty="0"/>
+          </a:p>
+        </p:txBody>
+      </p:sp>
+      <p:sp>
+        <p:nvSpPr>
+          <p:cNvPr id="22" name="Text 20"/>
           <p:cNvSpPr/>
           <p:nvPr/>
         </p:nvSpPr>
@@ -20059,7 +20527,7 @@
             <a:r>
               <a:rPr lang="en-US" sz="900" dirty="0">
                 <a:solidFill>
-                  <a:srgbClr val="9AA0A6"/>
+                  <a:srgbClr val="6E7278"/>
                 </a:solidFill>
                 <a:latin typeface="Arial" pitchFamily="34" charset="0"/>
                 <a:ea typeface="Arial" pitchFamily="34" charset="-122"/>
@@ -20073,7 +20541,7 @@
       </p:sp>
       <p:sp>
         <p:nvSpPr>
-          <p:cNvPr id="19" name="Text 17"/>
+          <p:cNvPr id="23" name="Text 21"/>
           <p:cNvSpPr/>
           <p:nvPr/>
         </p:nvSpPr>
@@ -20098,7 +20566,7 @@
             <a:r>
               <a:rPr lang="en-US" sz="900" dirty="0">
                 <a:solidFill>
-                  <a:srgbClr val="9AA0A6"/>
+                  <a:srgbClr val="6E7278"/>
                 </a:solidFill>
                 <a:latin typeface="Arial" pitchFamily="34" charset="0"/>
                 <a:ea typeface="Arial" pitchFamily="34" charset="-122"/>
@@ -20121,6 +20589,608 @@
 <file path=ppt/slides/slide42.xml><?xml version="1.0" encoding="utf-8"?>
 <p:sld xmlns:a="http://schemas.openxmlformats.org/drawingml/2006/main" xmlns:r="http://schemas.openxmlformats.org/officeDocument/2006/relationships" xmlns:p="http://schemas.openxmlformats.org/presentationml/2006/main">
   <p:cSld name="Slide 42">
+    <p:bg>
+      <p:bgPr>
+        <a:solidFill>
+          <a:srgbClr val="FFFFFF"/>
+        </a:solidFill>
+      </p:bgPr>
+    </p:bg>
+    <p:spTree>
+      <p:nvGrpSpPr>
+        <p:cNvPr id="1" name=""/>
+        <p:cNvGrpSpPr/>
+        <p:nvPr/>
+      </p:nvGrpSpPr>
+      <p:grpSpPr>
+        <a:xfrm>
+          <a:off x="0" y="0"/>
+          <a:ext cx="0" cy="0"/>
+          <a:chOff x="0" y="0"/>
+          <a:chExt cx="0" cy="0"/>
+        </a:xfrm>
+      </p:grpSpPr>
+      <p:sp>
+        <p:nvSpPr>
+          <p:cNvPr id="2" name="Shape 0"/>
+          <p:cNvSpPr/>
+          <p:nvPr/>
+        </p:nvSpPr>
+        <p:spPr>
+          <a:xfrm>
+            <a:off x="777240" y="621792"/>
+            <a:ext cx="91440" cy="91440"/>
+          </a:xfrm>
+          <a:prstGeom prst="ellipse">
+            <a:avLst/>
+          </a:prstGeom>
+          <a:solidFill>
+            <a:srgbClr val="EE4B2B"/>
+          </a:solidFill>
+          <a:ln/>
+        </p:spPr>
+      </p:sp>
+      <p:sp>
+        <p:nvSpPr>
+          <p:cNvPr id="3" name="Text 1"/>
+          <p:cNvSpPr/>
+          <p:nvPr/>
+        </p:nvSpPr>
+        <p:spPr>
+          <a:xfrm>
+            <a:off x="960120" y="530352"/>
+            <a:ext cx="8229600" cy="274320"/>
+          </a:xfrm>
+          <a:prstGeom prst="rect">
+            <a:avLst/>
+          </a:prstGeom>
+          <a:noFill/>
+          <a:ln/>
+        </p:spPr>
+        <p:txBody>
+          <a:bodyPr wrap="square" lIns="0" tIns="0" rIns="0" bIns="0" rtlCol="0" anchor="ctr"/>
+          <a:lstStyle/>
+          <a:p>
+            <a:pPr indent="0" marL="0">
+              <a:buNone/>
+            </a:pPr>
+            <a:r>
+              <a:rPr lang="en-US" sz="1100" b="1" spc="250" kern="0" dirty="0">
+                <a:solidFill>
+                  <a:srgbClr val="EE4B2B"/>
+                </a:solidFill>
+                <a:latin typeface="Arial" pitchFamily="34" charset="0"/>
+                <a:ea typeface="Arial" pitchFamily="34" charset="-122"/>
+                <a:cs typeface="Arial" pitchFamily="34" charset="-120"/>
+              </a:rPr>
+              <a:t>CASE, CLAPPING DETECTION</a:t>
+            </a:r>
+            <a:endParaRPr lang="en-US" sz="1100" dirty="0"/>
+          </a:p>
+        </p:txBody>
+      </p:sp>
+      <p:sp>
+        <p:nvSpPr>
+          <p:cNvPr id="4" name="Text 2"/>
+          <p:cNvSpPr/>
+          <p:nvPr/>
+        </p:nvSpPr>
+        <p:spPr>
+          <a:xfrm>
+            <a:off x="777240" y="896112"/>
+            <a:ext cx="10637215" cy="548640"/>
+          </a:xfrm>
+          <a:prstGeom prst="rect">
+            <a:avLst/>
+          </a:prstGeom>
+          <a:noFill/>
+          <a:ln/>
+        </p:spPr>
+        <p:txBody>
+          <a:bodyPr wrap="square" lIns="0" tIns="0" rIns="0" bIns="0" rtlCol="0" anchor="ctr"/>
+          <a:lstStyle/>
+          <a:p>
+            <a:pPr indent="0" marL="0">
+              <a:buNone/>
+            </a:pPr>
+            <a:r>
+              <a:rPr lang="en-US" sz="3000" b="1" dirty="0">
+                <a:solidFill>
+                  <a:srgbClr val="16181D"/>
+                </a:solidFill>
+                <a:latin typeface="Arial" pitchFamily="34" charset="0"/>
+                <a:ea typeface="Arial" pitchFamily="34" charset="-122"/>
+                <a:cs typeface="Arial" pitchFamily="34" charset="-120"/>
+              </a:rPr>
+              <a:t>SoundHook의 박수 감지, 실제 코드입니다</a:t>
+            </a:r>
+            <a:endParaRPr lang="en-US" sz="3000" dirty="0"/>
+          </a:p>
+        </p:txBody>
+      </p:sp>
+      <p:sp>
+        <p:nvSpPr>
+          <p:cNvPr id="5" name="Shape 3"/>
+          <p:cNvSpPr/>
+          <p:nvPr/>
+        </p:nvSpPr>
+        <p:spPr>
+          <a:xfrm>
+            <a:off x="777240" y="2011680"/>
+            <a:ext cx="6766560" cy="3401568"/>
+          </a:xfrm>
+          <a:prstGeom prst="roundRect">
+            <a:avLst>
+              <a:gd name="adj" fmla="val 2688"/>
+            </a:avLst>
+          </a:prstGeom>
+          <a:solidFill>
+            <a:srgbClr val="16181D"/>
+          </a:solidFill>
+          <a:ln/>
+        </p:spPr>
+      </p:sp>
+      <p:sp>
+        <p:nvSpPr>
+          <p:cNvPr id="6" name="Text 4"/>
+          <p:cNvSpPr/>
+          <p:nvPr/>
+        </p:nvSpPr>
+        <p:spPr>
+          <a:xfrm>
+            <a:off x="1088136" y="2322576"/>
+            <a:ext cx="6217920" cy="2852928"/>
+          </a:xfrm>
+          <a:prstGeom prst="rect">
+            <a:avLst/>
+          </a:prstGeom>
+          <a:noFill/>
+          <a:ln/>
+        </p:spPr>
+        <p:txBody>
+          <a:bodyPr wrap="square" lIns="0" tIns="0" rIns="0" bIns="0" rtlCol="0" anchor="t"/>
+          <a:lstStyle/>
+          <a:p>
+            <a:pPr indent="0" marL="0">
+              <a:lnSpc>
+                <a:spcPts val="1800"/>
+              </a:lnSpc>
+              <a:buNone/>
+            </a:pPr>
+            <a:r>
+              <a:rPr lang="en-US" sz="1000" dirty="0">
+                <a:solidFill>
+                  <a:srgbClr val="ECEDEF"/>
+                </a:solidFill>
+                <a:latin typeface="Courier New" pitchFamily="34" charset="0"/>
+                <a:ea typeface="Courier New" pitchFamily="34" charset="-122"/>
+                <a:cs typeface="Courier New" pitchFamily="34" charset="-120"/>
+              </a:rPr>
+              <a:t>// 1, 미션 정의, 인정할 레이블을 묶습니다</a:t>
+            </a:r>
+            <a:endParaRPr lang="en-US" sz="1000" dirty="0"/>
+          </a:p>
+          <a:p>
+            <a:pPr indent="0" marL="0">
+              <a:lnSpc>
+                <a:spcPts val="1800"/>
+              </a:lnSpc>
+              <a:buNone/>
+            </a:pPr>
+            <a:r>
+              <a:rPr lang="en-US" sz="1000" dirty="0">
+                <a:solidFill>
+                  <a:srgbClr val="ECEDEF"/>
+                </a:solidFill>
+                <a:latin typeface="Courier New" pitchFamily="34" charset="0"/>
+                <a:ea typeface="Courier New" pitchFamily="34" charset="-122"/>
+                <a:cs typeface="Courier New" pitchFamily="34" charset="-120"/>
+              </a:rPr>
+              <a:t>Mission(id: "clapping", title: "박수", hint: "손뼉을 리듬 있게",</a:t>
+            </a:r>
+            <a:endParaRPr lang="en-US" sz="1000" dirty="0"/>
+          </a:p>
+          <a:p>
+            <a:pPr indent="0" marL="0">
+              <a:lnSpc>
+                <a:spcPts val="1800"/>
+              </a:lnSpc>
+              <a:buNone/>
+            </a:pPr>
+            <a:r>
+              <a:rPr lang="en-US" sz="1000" dirty="0">
+                <a:solidFill>
+                  <a:srgbClr val="ECEDEF"/>
+                </a:solidFill>
+                <a:latin typeface="Courier New" pitchFamily="34" charset="0"/>
+                <a:ea typeface="Courier New" pitchFamily="34" charset="-122"/>
+                <a:cs typeface="Courier New" pitchFamily="34" charset="-120"/>
+              </a:rPr>
+              <a:t>        identifiers: ["clapping", "applause"], difficulty: 1)</a:t>
+            </a:r>
+            <a:endParaRPr lang="en-US" sz="1000" dirty="0"/>
+          </a:p>
+          <a:p>
+            <a:pPr indent="0" marL="0">
+              <a:lnSpc>
+                <a:spcPts val="1800"/>
+              </a:lnSpc>
+              <a:buNone/>
+            </a:pPr>
+            <a:endParaRPr lang="en-US" sz="1000" dirty="0"/>
+          </a:p>
+          <a:p>
+            <a:pPr indent="0" marL="0">
+              <a:lnSpc>
+                <a:spcPts val="1800"/>
+              </a:lnSpc>
+              <a:buNone/>
+            </a:pPr>
+            <a:r>
+              <a:rPr lang="en-US" sz="1000" dirty="0">
+                <a:solidFill>
+                  <a:srgbClr val="ECEDEF"/>
+                </a:solidFill>
+                <a:latin typeface="Courier New" pitchFamily="34" charset="0"/>
+                <a:ea typeface="Courier New" pitchFamily="34" charset="-122"/>
+                <a:cs typeface="Courier New" pitchFamily="34" charset="-120"/>
+              </a:rPr>
+              <a:t>// 2, 분류 결과에서 그 레이블만 골라 최대 확률을 봅니다</a:t>
+            </a:r>
+            <a:endParaRPr lang="en-US" sz="1000" dirty="0"/>
+          </a:p>
+          <a:p>
+            <a:pPr indent="0" marL="0">
+              <a:lnSpc>
+                <a:spcPts val="1800"/>
+              </a:lnSpc>
+              <a:buNone/>
+            </a:pPr>
+            <a:r>
+              <a:rPr lang="en-US" sz="1000" dirty="0">
+                <a:solidFill>
+                  <a:srgbClr val="ECEDEF"/>
+                </a:solidFill>
+                <a:latin typeface="Courier New" pitchFamily="34" charset="0"/>
+                <a:ea typeface="Courier New" pitchFamily="34" charset="-122"/>
+                <a:cs typeface="Courier New" pitchFamily="34" charset="-120"/>
+              </a:rPr>
+              <a:t>let matched = results</a:t>
+            </a:r>
+            <a:endParaRPr lang="en-US" sz="1000" dirty="0"/>
+          </a:p>
+          <a:p>
+            <a:pPr indent="0" marL="0">
+              <a:lnSpc>
+                <a:spcPts val="1800"/>
+              </a:lnSpc>
+              <a:buNone/>
+            </a:pPr>
+            <a:r>
+              <a:rPr lang="en-US" sz="1000" dirty="0">
+                <a:solidFill>
+                  <a:srgbClr val="ECEDEF"/>
+                </a:solidFill>
+                <a:latin typeface="Courier New" pitchFamily="34" charset="0"/>
+                <a:ea typeface="Courier New" pitchFamily="34" charset="-122"/>
+                <a:cs typeface="Courier New" pitchFamily="34" charset="-120"/>
+              </a:rPr>
+              <a:t>    .filter { mission.identifiers.contains($0.identifier) }</a:t>
+            </a:r>
+            <a:endParaRPr lang="en-US" sz="1000" dirty="0"/>
+          </a:p>
+          <a:p>
+            <a:pPr indent="0" marL="0">
+              <a:lnSpc>
+                <a:spcPts val="1800"/>
+              </a:lnSpc>
+              <a:buNone/>
+            </a:pPr>
+            <a:r>
+              <a:rPr lang="en-US" sz="1000" dirty="0">
+                <a:solidFill>
+                  <a:srgbClr val="ECEDEF"/>
+                </a:solidFill>
+                <a:latin typeface="Courier New" pitchFamily="34" charset="0"/>
+                <a:ea typeface="Courier New" pitchFamily="34" charset="-122"/>
+                <a:cs typeface="Courier New" pitchFamily="34" charset="-120"/>
+              </a:rPr>
+              <a:t>    .map(\.confidence).max() ?? 0</a:t>
+            </a:r>
+            <a:endParaRPr lang="en-US" sz="1000" dirty="0"/>
+          </a:p>
+          <a:p>
+            <a:pPr indent="0" marL="0">
+              <a:lnSpc>
+                <a:spcPts val="1800"/>
+              </a:lnSpc>
+              <a:buNone/>
+            </a:pPr>
+            <a:endParaRPr lang="en-US" sz="1000" dirty="0"/>
+          </a:p>
+          <a:p>
+            <a:pPr indent="0" marL="0">
+              <a:lnSpc>
+                <a:spcPts val="1800"/>
+              </a:lnSpc>
+              <a:buNone/>
+            </a:pPr>
+            <a:r>
+              <a:rPr lang="en-US" sz="1000" dirty="0">
+                <a:solidFill>
+                  <a:srgbClr val="ECEDEF"/>
+                </a:solidFill>
+                <a:latin typeface="Courier New" pitchFamily="34" charset="0"/>
+                <a:ea typeface="Courier New" pitchFamily="34" charset="-122"/>
+                <a:cs typeface="Courier New" pitchFamily="34" charset="-120"/>
+              </a:rPr>
+              <a:t>// 3, 목표를 넘으면 그 자리에서 성공 처리합니다</a:t>
+            </a:r>
+            <a:endParaRPr lang="en-US" sz="1000" dirty="0"/>
+          </a:p>
+          <a:p>
+            <a:pPr indent="0" marL="0">
+              <a:lnSpc>
+                <a:spcPts val="1800"/>
+              </a:lnSpc>
+              <a:buNone/>
+            </a:pPr>
+            <a:r>
+              <a:rPr lang="en-US" sz="1000" dirty="0">
+                <a:solidFill>
+                  <a:srgbClr val="ECEDEF"/>
+                </a:solidFill>
+                <a:latin typeface="Courier New" pitchFamily="34" charset="0"/>
+                <a:ea typeface="Courier New" pitchFamily="34" charset="-122"/>
+                <a:cs typeface="Courier New" pitchFamily="34" charset="-120"/>
+              </a:rPr>
+              <a:t>progress = min(matched / targetConfidence, 1)</a:t>
+            </a:r>
+            <a:endParaRPr lang="en-US" sz="1000" dirty="0"/>
+          </a:p>
+          <a:p>
+            <a:pPr indent="0" marL="0">
+              <a:lnSpc>
+                <a:spcPts val="1800"/>
+              </a:lnSpc>
+              <a:buNone/>
+            </a:pPr>
+            <a:r>
+              <a:rPr lang="en-US" sz="1000" dirty="0">
+                <a:solidFill>
+                  <a:srgbClr val="ECEDEF"/>
+                </a:solidFill>
+                <a:latin typeface="Courier New" pitchFamily="34" charset="0"/>
+                <a:ea typeface="Courier New" pitchFamily="34" charset="-122"/>
+                <a:cs typeface="Courier New" pitchFamily="34" charset="-120"/>
+              </a:rPr>
+              <a:t>if matched &gt;= targetConfidence { endRound(cleared: true) }</a:t>
+            </a:r>
+            <a:endParaRPr lang="en-US" sz="1000" dirty="0"/>
+          </a:p>
+        </p:txBody>
+      </p:sp>
+      <p:sp>
+        <p:nvSpPr>
+          <p:cNvPr id="7" name="Shape 5"/>
+          <p:cNvSpPr/>
+          <p:nvPr/>
+        </p:nvSpPr>
+        <p:spPr>
+          <a:xfrm>
+            <a:off x="7863840" y="2011680"/>
+            <a:ext cx="3550615" cy="3401568"/>
+          </a:xfrm>
+          <a:prstGeom prst="roundRect">
+            <a:avLst>
+              <a:gd name="adj" fmla="val 2688"/>
+            </a:avLst>
+          </a:prstGeom>
+          <a:solidFill>
+            <a:srgbClr val="F1F1F3"/>
+          </a:solidFill>
+          <a:ln/>
+        </p:spPr>
+      </p:sp>
+      <p:sp>
+        <p:nvSpPr>
+          <p:cNvPr id="8" name="Text 6"/>
+          <p:cNvSpPr/>
+          <p:nvPr/>
+        </p:nvSpPr>
+        <p:spPr>
+          <a:xfrm>
+            <a:off x="8138160" y="2322576"/>
+            <a:ext cx="3001975" cy="365760"/>
+          </a:xfrm>
+          <a:prstGeom prst="rect">
+            <a:avLst/>
+          </a:prstGeom>
+          <a:noFill/>
+          <a:ln/>
+        </p:spPr>
+        <p:txBody>
+          <a:bodyPr wrap="square" lIns="0" tIns="0" rIns="0" bIns="0" rtlCol="0" anchor="ctr"/>
+          <a:lstStyle/>
+          <a:p>
+            <a:pPr indent="0" marL="0">
+              <a:buNone/>
+            </a:pPr>
+            <a:r>
+              <a:rPr lang="en-US" sz="1600" b="1" dirty="0">
+                <a:solidFill>
+                  <a:srgbClr val="16181D"/>
+                </a:solidFill>
+                <a:latin typeface="Arial" pitchFamily="34" charset="0"/>
+                <a:ea typeface="Arial" pitchFamily="34" charset="-122"/>
+                <a:cs typeface="Arial" pitchFamily="34" charset="-120"/>
+              </a:rPr>
+              <a:t>여기서 배울 것</a:t>
+            </a:r>
+            <a:endParaRPr lang="en-US" sz="1600" dirty="0"/>
+          </a:p>
+        </p:txBody>
+      </p:sp>
+      <p:sp>
+        <p:nvSpPr>
+          <p:cNvPr id="9" name="Text 7"/>
+          <p:cNvSpPr/>
+          <p:nvPr/>
+        </p:nvSpPr>
+        <p:spPr>
+          <a:xfrm>
+            <a:off x="8138160" y="2788920"/>
+            <a:ext cx="3001975" cy="2103120"/>
+          </a:xfrm>
+          <a:prstGeom prst="rect">
+            <a:avLst/>
+          </a:prstGeom>
+          <a:noFill/>
+          <a:ln/>
+        </p:spPr>
+        <p:txBody>
+          <a:bodyPr wrap="square" lIns="0" tIns="0" rIns="0" bIns="0" rtlCol="0" anchor="t"/>
+          <a:lstStyle/>
+          <a:p>
+            <a:pPr indent="0" marL="0">
+              <a:lnSpc>
+                <a:spcPts val="2000"/>
+              </a:lnSpc>
+              <a:buNone/>
+            </a:pPr>
+            <a:r>
+              <a:rPr lang="en-US" sz="1300" dirty="0">
+                <a:solidFill>
+                  <a:srgbClr val="6E7278"/>
+                </a:solidFill>
+                <a:latin typeface="Arial" pitchFamily="34" charset="0"/>
+                <a:ea typeface="Arial" pitchFamily="34" charset="-122"/>
+                <a:cs typeface="Arial" pitchFamily="34" charset="-120"/>
+              </a:rPr>
+              <a:t>박수 감지에 필요한 코드는 이게 전부입니다. 학습도, 모델 파일도 없습니다.</a:t>
+            </a:r>
+            <a:endParaRPr lang="en-US" sz="1300" dirty="0"/>
+          </a:p>
+          <a:p>
+            <a:pPr indent="0" marL="0">
+              <a:lnSpc>
+                <a:spcPts val="2000"/>
+              </a:lnSpc>
+              <a:buNone/>
+            </a:pPr>
+            <a:endParaRPr lang="en-US" sz="1300" dirty="0"/>
+          </a:p>
+          <a:p>
+            <a:pPr indent="0" marL="0">
+              <a:lnSpc>
+                <a:spcPts val="2000"/>
+              </a:lnSpc>
+              <a:buNone/>
+            </a:pPr>
+            <a:r>
+              <a:rPr lang="en-US" sz="1300" dirty="0">
+                <a:solidFill>
+                  <a:srgbClr val="6E7278"/>
+                </a:solidFill>
+                <a:latin typeface="Arial" pitchFamily="34" charset="0"/>
+                <a:ea typeface="Arial" pitchFamily="34" charset="-122"/>
+                <a:cs typeface="Arial" pitchFamily="34" charset="-120"/>
+              </a:rPr>
+              <a:t>바꾸고 싶은 소리가 생기면 identifiers만 갈아 끼우면 됩니다. 내장 분류기가 모르는 소리일 때, 그때 비로소 Create ML이 필요합니다.</a:t>
+            </a:r>
+            <a:endParaRPr lang="en-US" sz="1300" dirty="0"/>
+          </a:p>
+        </p:txBody>
+      </p:sp>
+      <p:sp>
+        <p:nvSpPr>
+          <p:cNvPr id="10" name="Text 8"/>
+          <p:cNvSpPr/>
+          <p:nvPr/>
+        </p:nvSpPr>
+        <p:spPr>
+          <a:xfrm>
+            <a:off x="777240" y="6355080"/>
+            <a:ext cx="7315200" cy="237744"/>
+          </a:xfrm>
+          <a:prstGeom prst="rect">
+            <a:avLst/>
+          </a:prstGeom>
+          <a:noFill/>
+          <a:ln/>
+        </p:spPr>
+        <p:txBody>
+          <a:bodyPr wrap="square" lIns="0" tIns="0" rIns="0" bIns="0" rtlCol="0" anchor="ctr"/>
+          <a:lstStyle/>
+          <a:p>
+            <a:pPr indent="0" marL="0">
+              <a:buNone/>
+            </a:pPr>
+            <a:r>
+              <a:rPr lang="en-US" sz="900" dirty="0">
+                <a:solidFill>
+                  <a:srgbClr val="6E7278"/>
+                </a:solidFill>
+                <a:latin typeface="Arial" pitchFamily="34" charset="0"/>
+                <a:ea typeface="Arial" pitchFamily="34" charset="-122"/>
+                <a:cs typeface="Arial" pitchFamily="34" charset="-120"/>
+              </a:rPr>
+              <a:t>CreateML 스터디 · 4주차 · Sound Classification</a:t>
+            </a:r>
+            <a:endParaRPr lang="en-US" sz="900" dirty="0"/>
+          </a:p>
+        </p:txBody>
+      </p:sp>
+      <p:sp>
+        <p:nvSpPr>
+          <p:cNvPr id="11" name="Text 9"/>
+          <p:cNvSpPr/>
+          <p:nvPr/>
+        </p:nvSpPr>
+        <p:spPr>
+          <a:xfrm>
+            <a:off x="10865815" y="6355080"/>
+            <a:ext cx="548640" cy="237744"/>
+          </a:xfrm>
+          <a:prstGeom prst="rect">
+            <a:avLst/>
+          </a:prstGeom>
+          <a:noFill/>
+          <a:ln/>
+        </p:spPr>
+        <p:txBody>
+          <a:bodyPr wrap="square" lIns="0" tIns="0" rIns="0" bIns="0" rtlCol="0" anchor="ctr"/>
+          <a:lstStyle/>
+          <a:p>
+            <a:pPr algn="r" indent="0" marL="0">
+              <a:buNone/>
+            </a:pPr>
+            <a:r>
+              <a:rPr lang="en-US" sz="900" dirty="0">
+                <a:solidFill>
+                  <a:srgbClr val="6E7278"/>
+                </a:solidFill>
+                <a:latin typeface="Arial" pitchFamily="34" charset="0"/>
+                <a:ea typeface="Arial" pitchFamily="34" charset="-122"/>
+                <a:cs typeface="Arial" pitchFamily="34" charset="-120"/>
+              </a:rPr>
+              <a:t>30</a:t>
+            </a:r>
+            <a:endParaRPr lang="en-US" sz="900" dirty="0"/>
+          </a:p>
+        </p:txBody>
+      </p:sp>
+    </p:spTree>
+  </p:cSld>
+  <p:clrMapOvr>
+    <a:masterClrMapping/>
+  </p:clrMapOvr>
+</p:sld>
+</file>
+
+<file path=ppt/slides/slide43.xml><?xml version="1.0" encoding="utf-8"?>
+<p:sld xmlns:a="http://schemas.openxmlformats.org/drawingml/2006/main" xmlns:r="http://schemas.openxmlformats.org/officeDocument/2006/relationships" xmlns:p="http://schemas.openxmlformats.org/presentationml/2006/main">
+  <p:cSld name="Slide 43">
     <p:bg>
       <p:bgPr>
         <a:solidFill>
@@ -20144,17 +21214,219 @@
       </p:grpSpPr>
       <p:sp>
         <p:nvSpPr>
-          <p:cNvPr id="2" name="Shape 0"/>
-          <p:cNvSpPr/>
-          <p:nvPr/>
-        </p:nvSpPr>
-        <p:spPr>
-          <a:xfrm>
-            <a:off x="777240" y="621792"/>
-            <a:ext cx="91440" cy="91440"/>
-          </a:xfrm>
-          <a:prstGeom prst="ellipse">
-            <a:avLst/>
+          <p:cNvPr id="2" name="Text 0"/>
+          <p:cNvSpPr/>
+          <p:nvPr/>
+        </p:nvSpPr>
+        <p:spPr>
+          <a:xfrm>
+            <a:off x="777240" y="2148840"/>
+            <a:ext cx="3657600" cy="365760"/>
+          </a:xfrm>
+          <a:prstGeom prst="rect">
+            <a:avLst/>
+          </a:prstGeom>
+          <a:noFill/>
+          <a:ln/>
+        </p:spPr>
+        <p:txBody>
+          <a:bodyPr wrap="square" lIns="0" tIns="0" rIns="0" bIns="0" rtlCol="0" anchor="ctr"/>
+          <a:lstStyle/>
+          <a:p>
+            <a:pPr indent="0" marL="0">
+              <a:buNone/>
+            </a:pPr>
+            <a:r>
+              <a:rPr lang="en-US" sz="1500" b="1" spc="400" kern="0" dirty="0">
+                <a:solidFill>
+                  <a:srgbClr val="9AA0A6"/>
+                </a:solidFill>
+                <a:latin typeface="Arial" pitchFamily="34" charset="0"/>
+                <a:ea typeface="Arial" pitchFamily="34" charset="-122"/>
+                <a:cs typeface="Arial" pitchFamily="34" charset="-120"/>
+              </a:rPr>
+              <a:t>ROUND</a:t>
+            </a:r>
+            <a:endParaRPr lang="en-US" sz="1500" dirty="0"/>
+          </a:p>
+        </p:txBody>
+      </p:sp>
+      <p:sp>
+        <p:nvSpPr>
+          <p:cNvPr id="3" name="Text 1"/>
+          <p:cNvSpPr/>
+          <p:nvPr/>
+        </p:nvSpPr>
+        <p:spPr>
+          <a:xfrm>
+            <a:off x="685800" y="2240280"/>
+            <a:ext cx="2011680" cy="2286000"/>
+          </a:xfrm>
+          <a:prstGeom prst="rect">
+            <a:avLst/>
+          </a:prstGeom>
+          <a:noFill/>
+          <a:ln/>
+        </p:spPr>
+        <p:txBody>
+          <a:bodyPr wrap="square" lIns="0" tIns="0" rIns="0" bIns="0" rtlCol="0" anchor="ctr"/>
+          <a:lstStyle/>
+          <a:p>
+            <a:pPr indent="0" marL="0">
+              <a:buNone/>
+            </a:pPr>
+            <a:r>
+              <a:rPr lang="en-US" sz="12000" b="1" dirty="0">
+                <a:solidFill>
+                  <a:srgbClr val="EE4B2B"/>
+                </a:solidFill>
+                <a:latin typeface="Arial" pitchFamily="34" charset="0"/>
+                <a:ea typeface="Arial" pitchFamily="34" charset="-122"/>
+                <a:cs typeface="Arial" pitchFamily="34" charset="-120"/>
+              </a:rPr>
+              <a:t>3</a:t>
+            </a:r>
+            <a:endParaRPr lang="en-US" sz="12000" dirty="0"/>
+          </a:p>
+        </p:txBody>
+      </p:sp>
+      <p:sp>
+        <p:nvSpPr>
+          <p:cNvPr id="4" name="Text 2"/>
+          <p:cNvSpPr/>
+          <p:nvPr/>
+        </p:nvSpPr>
+        <p:spPr>
+          <a:xfrm>
+            <a:off x="2697480" y="2651760"/>
+            <a:ext cx="7772400" cy="822960"/>
+          </a:xfrm>
+          <a:prstGeom prst="rect">
+            <a:avLst/>
+          </a:prstGeom>
+          <a:noFill/>
+          <a:ln/>
+        </p:spPr>
+        <p:txBody>
+          <a:bodyPr wrap="square" lIns="0" tIns="0" rIns="0" bIns="0" rtlCol="0" anchor="ctr"/>
+          <a:lstStyle/>
+          <a:p>
+            <a:pPr indent="0" marL="0">
+              <a:buNone/>
+            </a:pPr>
+            <a:r>
+              <a:rPr lang="en-US" sz="4400" b="1" dirty="0">
+                <a:solidFill>
+                  <a:srgbClr val="FFFFFF"/>
+                </a:solidFill>
+                <a:latin typeface="Arial" pitchFamily="34" charset="0"/>
+                <a:ea typeface="Arial" pitchFamily="34" charset="-122"/>
+                <a:cs typeface="Arial" pitchFamily="34" charset="-120"/>
+              </a:rPr>
+              <a:t>다음 주 시연</a:t>
+            </a:r>
+            <a:endParaRPr lang="en-US" sz="4400" dirty="0"/>
+          </a:p>
+        </p:txBody>
+      </p:sp>
+      <p:sp>
+        <p:nvSpPr>
+          <p:cNvPr id="5" name="Text 3"/>
+          <p:cNvSpPr/>
+          <p:nvPr/>
+        </p:nvSpPr>
+        <p:spPr>
+          <a:xfrm>
+            <a:off x="2743200" y="3520440"/>
+            <a:ext cx="7772400" cy="457200"/>
+          </a:xfrm>
+          <a:prstGeom prst="rect">
+            <a:avLst/>
+          </a:prstGeom>
+          <a:noFill/>
+          <a:ln/>
+        </p:spPr>
+        <p:txBody>
+          <a:bodyPr wrap="square" lIns="0" tIns="0" rIns="0" bIns="0" rtlCol="0" anchor="ctr"/>
+          <a:lstStyle/>
+          <a:p>
+            <a:pPr indent="0" marL="0">
+              <a:buNone/>
+            </a:pPr>
+            <a:r>
+              <a:rPr lang="en-US" sz="1500" dirty="0">
+                <a:solidFill>
+                  <a:srgbClr val="9AA0A6"/>
+                </a:solidFill>
+                <a:latin typeface="Arial" pitchFamily="34" charset="0"/>
+                <a:ea typeface="Arial" pitchFamily="34" charset="-122"/>
+                <a:cs typeface="Arial" pitchFamily="34" charset="-120"/>
+              </a:rPr>
+              <a:t>3분 · 팀 미션 발제</a:t>
+            </a:r>
+            <a:endParaRPr lang="en-US" sz="1500" dirty="0"/>
+          </a:p>
+        </p:txBody>
+      </p:sp>
+      <p:sp>
+        <p:nvSpPr>
+          <p:cNvPr id="6" name="Shape 4"/>
+          <p:cNvSpPr/>
+          <p:nvPr/>
+        </p:nvSpPr>
+        <p:spPr>
+          <a:xfrm>
+            <a:off x="777240" y="4983480"/>
+            <a:ext cx="109728" cy="274320"/>
+          </a:xfrm>
+          <a:prstGeom prst="roundRect">
+            <a:avLst>
+              <a:gd name="adj" fmla="val 41667"/>
+            </a:avLst>
+          </a:prstGeom>
+          <a:solidFill>
+            <a:srgbClr val="3A3E45"/>
+          </a:solidFill>
+          <a:ln/>
+        </p:spPr>
+      </p:sp>
+      <p:sp>
+        <p:nvSpPr>
+          <p:cNvPr id="7" name="Shape 5"/>
+          <p:cNvSpPr/>
+          <p:nvPr/>
+        </p:nvSpPr>
+        <p:spPr>
+          <a:xfrm>
+            <a:off x="1051560" y="4754880"/>
+            <a:ext cx="109728" cy="731520"/>
+          </a:xfrm>
+          <a:prstGeom prst="roundRect">
+            <a:avLst>
+              <a:gd name="adj" fmla="val 41667"/>
+            </a:avLst>
+          </a:prstGeom>
+          <a:solidFill>
+            <a:srgbClr val="3A3E45"/>
+          </a:solidFill>
+          <a:ln/>
+        </p:spPr>
+      </p:sp>
+      <p:sp>
+        <p:nvSpPr>
+          <p:cNvPr id="8" name="Shape 6"/>
+          <p:cNvSpPr/>
+          <p:nvPr/>
+        </p:nvSpPr>
+        <p:spPr>
+          <a:xfrm>
+            <a:off x="1325880" y="4480560"/>
+            <a:ext cx="109728" cy="1280160"/>
+          </a:xfrm>
+          <a:prstGeom prst="roundRect">
+            <a:avLst>
+              <a:gd name="adj" fmla="val 41667"/>
+            </a:avLst>
           </a:prstGeom>
           <a:solidFill>
             <a:srgbClr val="EE4B2B"/>
@@ -20164,692 +21436,205 @@
       </p:sp>
       <p:sp>
         <p:nvSpPr>
-          <p:cNvPr id="3" name="Text 1"/>
-          <p:cNvSpPr/>
-          <p:nvPr/>
-        </p:nvSpPr>
-        <p:spPr>
-          <a:xfrm>
-            <a:off x="960120" y="530352"/>
-            <a:ext cx="8229600" cy="274320"/>
-          </a:xfrm>
-          <a:prstGeom prst="rect">
-            <a:avLst/>
-          </a:prstGeom>
-          <a:noFill/>
-          <a:ln/>
-        </p:spPr>
-        <p:txBody>
-          <a:bodyPr wrap="square" lIns="0" tIns="0" rIns="0" bIns="0" rtlCol="0" anchor="ctr"/>
-          <a:lstStyle/>
-          <a:p>
-            <a:pPr indent="0" marL="0">
-              <a:buNone/>
-            </a:pPr>
-            <a:r>
-              <a:rPr lang="en-US" sz="1100" b="1" spc="250" kern="0" dirty="0">
-                <a:solidFill>
-                  <a:srgbClr val="EE4B2B"/>
-                </a:solidFill>
-                <a:latin typeface="Arial" pitchFamily="34" charset="0"/>
-                <a:ea typeface="Arial" pitchFamily="34" charset="-122"/>
-                <a:cs typeface="Arial" pitchFamily="34" charset="-120"/>
-              </a:rPr>
-              <a:t>TEAM MISSION</a:t>
-            </a:r>
-            <a:endParaRPr lang="en-US" sz="1100" dirty="0"/>
-          </a:p>
-        </p:txBody>
-      </p:sp>
-      <p:sp>
-        <p:nvSpPr>
-          <p:cNvPr id="4" name="Text 2"/>
-          <p:cNvSpPr/>
-          <p:nvPr/>
-        </p:nvSpPr>
-        <p:spPr>
-          <a:xfrm>
-            <a:off x="777240" y="896112"/>
-            <a:ext cx="10637215" cy="548640"/>
-          </a:xfrm>
-          <a:prstGeom prst="rect">
-            <a:avLst/>
-          </a:prstGeom>
-          <a:noFill/>
-          <a:ln/>
-        </p:spPr>
-        <p:txBody>
-          <a:bodyPr wrap="square" lIns="0" tIns="0" rIns="0" bIns="0" rtlCol="0" anchor="ctr"/>
-          <a:lstStyle/>
-          <a:p>
-            <a:pPr indent="0" marL="0">
-              <a:buNone/>
-            </a:pPr>
-            <a:r>
-              <a:rPr lang="en-US" sz="3000" b="1" dirty="0">
-                <a:solidFill>
-                  <a:srgbClr val="FFFFFF"/>
-                </a:solidFill>
-                <a:latin typeface="Arial" pitchFamily="34" charset="0"/>
-                <a:ea typeface="Arial" pitchFamily="34" charset="-122"/>
-                <a:cs typeface="Arial" pitchFamily="34" charset="-120"/>
-              </a:rPr>
-              <a:t>다음 주까지: 소리로 반응하는 앱 하나</a:t>
-            </a:r>
-            <a:endParaRPr lang="en-US" sz="3000" dirty="0"/>
-          </a:p>
-        </p:txBody>
-      </p:sp>
-      <p:sp>
-        <p:nvSpPr>
-          <p:cNvPr id="5" name="Shape 3"/>
-          <p:cNvSpPr/>
-          <p:nvPr/>
-        </p:nvSpPr>
-        <p:spPr>
-          <a:xfrm>
-            <a:off x="777240" y="2194560"/>
-            <a:ext cx="2467280" cy="2286000"/>
+          <p:cNvPr id="9" name="Shape 7"/>
+          <p:cNvSpPr/>
+          <p:nvPr/>
+        </p:nvSpPr>
+        <p:spPr>
+          <a:xfrm>
+            <a:off x="1600200" y="4709160"/>
+            <a:ext cx="109728" cy="822960"/>
           </a:xfrm>
           <a:prstGeom prst="roundRect">
             <a:avLst>
-              <a:gd name="adj" fmla="val 4000"/>
+              <a:gd name="adj" fmla="val 41667"/>
             </a:avLst>
           </a:prstGeom>
           <a:solidFill>
-            <a:srgbClr val="23262C"/>
+            <a:srgbClr val="3A3E45"/>
           </a:solidFill>
           <a:ln/>
         </p:spPr>
       </p:sp>
       <p:sp>
         <p:nvSpPr>
-          <p:cNvPr id="6" name="Text 4"/>
-          <p:cNvSpPr/>
-          <p:nvPr/>
-        </p:nvSpPr>
-        <p:spPr>
-          <a:xfrm>
-            <a:off x="1069848" y="2523744"/>
-            <a:ext cx="1882064" cy="384048"/>
-          </a:xfrm>
-          <a:prstGeom prst="rect">
-            <a:avLst/>
-          </a:prstGeom>
-          <a:noFill/>
-          <a:ln/>
-        </p:spPr>
-        <p:txBody>
-          <a:bodyPr wrap="square" lIns="0" tIns="0" rIns="0" bIns="0" rtlCol="0" anchor="ctr"/>
-          <a:lstStyle/>
-          <a:p>
-            <a:pPr indent="0" marL="0">
-              <a:buNone/>
-            </a:pPr>
-            <a:r>
-              <a:rPr lang="en-US" sz="1700" b="1" dirty="0">
-                <a:solidFill>
-                  <a:srgbClr val="FFFFFF"/>
-                </a:solidFill>
-                <a:latin typeface="Arial" pitchFamily="34" charset="0"/>
-                <a:ea typeface="Arial" pitchFamily="34" charset="-122"/>
-                <a:cs typeface="Arial" pitchFamily="34" charset="-120"/>
-              </a:rPr>
-              <a:t>박수 게임</a:t>
-            </a:r>
-            <a:endParaRPr lang="en-US" sz="1700" dirty="0"/>
-          </a:p>
-        </p:txBody>
-      </p:sp>
-      <p:sp>
-        <p:nvSpPr>
-          <p:cNvPr id="7" name="Text 5"/>
-          <p:cNvSpPr/>
-          <p:nvPr/>
-        </p:nvSpPr>
-        <p:spPr>
-          <a:xfrm>
-            <a:off x="1069848" y="2980944"/>
-            <a:ext cx="1882064" cy="914400"/>
-          </a:xfrm>
-          <a:prstGeom prst="rect">
-            <a:avLst/>
-          </a:prstGeom>
-          <a:noFill/>
-          <a:ln/>
-        </p:spPr>
-        <p:txBody>
-          <a:bodyPr wrap="square" lIns="0" tIns="0" rIns="0" bIns="0" rtlCol="0" anchor="t"/>
-          <a:lstStyle/>
-          <a:p>
-            <a:pPr indent="0" marL="0">
-              <a:lnSpc>
-                <a:spcPts val="1800"/>
-              </a:lnSpc>
-              <a:buNone/>
-            </a:pPr>
-            <a:r>
-              <a:rPr lang="en-US" sz="1250" dirty="0">
-                <a:solidFill>
-                  <a:srgbClr val="9AA0A6"/>
-                </a:solidFill>
-                <a:latin typeface="Arial" pitchFamily="34" charset="0"/>
-                <a:ea typeface="Arial" pitchFamily="34" charset="-122"/>
-                <a:cs typeface="Arial" pitchFamily="34" charset="-120"/>
-              </a:rPr>
-              <a:t>오늘 모델 그대로 + 게임 로직만</a:t>
-            </a:r>
-            <a:endParaRPr lang="en-US" sz="1250" dirty="0"/>
-          </a:p>
-        </p:txBody>
-      </p:sp>
-      <p:sp>
-        <p:nvSpPr>
-          <p:cNvPr id="8" name="Text 6"/>
-          <p:cNvSpPr/>
-          <p:nvPr/>
-        </p:nvSpPr>
-        <p:spPr>
-          <a:xfrm>
-            <a:off x="1069848" y="3977640"/>
-            <a:ext cx="1882064" cy="274320"/>
-          </a:xfrm>
-          <a:prstGeom prst="rect">
-            <a:avLst/>
-          </a:prstGeom>
-          <a:noFill/>
-          <a:ln/>
-        </p:spPr>
-        <p:txBody>
-          <a:bodyPr wrap="square" lIns="0" tIns="0" rIns="0" bIns="0" rtlCol="0" anchor="ctr"/>
-          <a:lstStyle/>
-          <a:p>
-            <a:pPr indent="0" marL="0">
-              <a:buNone/>
-            </a:pPr>
-            <a:r>
-              <a:rPr lang="en-US" sz="1150" b="1" dirty="0">
-                <a:solidFill>
-                  <a:srgbClr val="EE4B2B"/>
-                </a:solidFill>
-                <a:latin typeface="Arial" pitchFamily="34" charset="0"/>
-                <a:ea typeface="Arial" pitchFamily="34" charset="-122"/>
-                <a:cs typeface="Arial" pitchFamily="34" charset="-120"/>
-              </a:rPr>
-              <a:t>최단 경로</a:t>
-            </a:r>
-            <a:endParaRPr lang="en-US" sz="1150" dirty="0"/>
-          </a:p>
-        </p:txBody>
-      </p:sp>
-      <p:sp>
-        <p:nvSpPr>
-          <p:cNvPr id="9" name="Shape 7"/>
-          <p:cNvSpPr/>
-          <p:nvPr/>
-        </p:nvSpPr>
-        <p:spPr>
-          <a:xfrm>
-            <a:off x="3500552" y="2194560"/>
-            <a:ext cx="2467280" cy="2286000"/>
+          <p:cNvPr id="10" name="Shape 8"/>
+          <p:cNvSpPr/>
+          <p:nvPr/>
+        </p:nvSpPr>
+        <p:spPr>
+          <a:xfrm>
+            <a:off x="1874520" y="4297680"/>
+            <a:ext cx="109728" cy="1645920"/>
           </a:xfrm>
           <a:prstGeom prst="roundRect">
             <a:avLst>
-              <a:gd name="adj" fmla="val 4000"/>
+              <a:gd name="adj" fmla="val 41667"/>
             </a:avLst>
           </a:prstGeom>
           <a:solidFill>
-            <a:srgbClr val="23262C"/>
+            <a:srgbClr val="3A3E45"/>
           </a:solidFill>
           <a:ln/>
         </p:spPr>
       </p:sp>
       <p:sp>
         <p:nvSpPr>
-          <p:cNvPr id="10" name="Text 8"/>
-          <p:cNvSpPr/>
-          <p:nvPr/>
-        </p:nvSpPr>
-        <p:spPr>
-          <a:xfrm>
-            <a:off x="3793160" y="2523744"/>
-            <a:ext cx="1882064" cy="384048"/>
-          </a:xfrm>
-          <a:prstGeom prst="rect">
-            <a:avLst/>
-          </a:prstGeom>
-          <a:noFill/>
-          <a:ln/>
-        </p:spPr>
-        <p:txBody>
-          <a:bodyPr wrap="square" lIns="0" tIns="0" rIns="0" bIns="0" rtlCol="0" anchor="ctr"/>
-          <a:lstStyle/>
-          <a:p>
-            <a:pPr indent="0" marL="0">
-              <a:buNone/>
-            </a:pPr>
-            <a:r>
-              <a:rPr lang="en-US" sz="1700" b="1" dirty="0">
-                <a:solidFill>
-                  <a:srgbClr val="FFFFFF"/>
-                </a:solidFill>
-                <a:latin typeface="Arial" pitchFamily="34" charset="0"/>
-                <a:ea typeface="Arial" pitchFamily="34" charset="-122"/>
-                <a:cs typeface="Arial" pitchFamily="34" charset="-120"/>
-              </a:rPr>
-              <a:t>우리 집 소리 알림</a:t>
-            </a:r>
-            <a:endParaRPr lang="en-US" sz="1700" dirty="0"/>
-          </a:p>
-        </p:txBody>
-      </p:sp>
-      <p:sp>
-        <p:nvSpPr>
-          <p:cNvPr id="11" name="Text 9"/>
-          <p:cNvSpPr/>
-          <p:nvPr/>
-        </p:nvSpPr>
-        <p:spPr>
-          <a:xfrm>
-            <a:off x="3793160" y="2980944"/>
-            <a:ext cx="1882064" cy="914400"/>
-          </a:xfrm>
-          <a:prstGeom prst="rect">
-            <a:avLst/>
-          </a:prstGeom>
-          <a:noFill/>
-          <a:ln/>
-        </p:spPr>
-        <p:txBody>
-          <a:bodyPr wrap="square" lIns="0" tIns="0" rIns="0" bIns="0" rtlCol="0" anchor="t"/>
-          <a:lstStyle/>
-          <a:p>
-            <a:pPr indent="0" marL="0">
-              <a:lnSpc>
-                <a:spcPts val="1800"/>
-              </a:lnSpc>
-              <a:buNone/>
-            </a:pPr>
-            <a:r>
-              <a:rPr lang="en-US" sz="1250" dirty="0">
-                <a:solidFill>
-                  <a:srgbClr val="9AA0A6"/>
-                </a:solidFill>
-                <a:latin typeface="Arial" pitchFamily="34" charset="0"/>
-                <a:ea typeface="Arial" pitchFamily="34" charset="-122"/>
-                <a:cs typeface="Arial" pitchFamily="34" charset="-120"/>
-              </a:rPr>
-              <a:t>초인종·주전자·세탁기 종료음</a:t>
-            </a:r>
-            <a:endParaRPr lang="en-US" sz="1250" dirty="0"/>
-          </a:p>
-        </p:txBody>
-      </p:sp>
-      <p:sp>
-        <p:nvSpPr>
-          <p:cNvPr id="12" name="Text 10"/>
-          <p:cNvSpPr/>
-          <p:nvPr/>
-        </p:nvSpPr>
-        <p:spPr>
-          <a:xfrm>
-            <a:off x="3793160" y="3977640"/>
-            <a:ext cx="1882064" cy="274320"/>
-          </a:xfrm>
-          <a:prstGeom prst="rect">
-            <a:avLst/>
-          </a:prstGeom>
-          <a:noFill/>
-          <a:ln/>
-        </p:spPr>
-        <p:txBody>
-          <a:bodyPr wrap="square" lIns="0" tIns="0" rIns="0" bIns="0" rtlCol="0" anchor="ctr"/>
-          <a:lstStyle/>
-          <a:p>
-            <a:pPr indent="0" marL="0">
-              <a:buNone/>
-            </a:pPr>
-            <a:r>
-              <a:rPr lang="en-US" sz="1150" b="1" dirty="0">
-                <a:solidFill>
-                  <a:srgbClr val="EE4B2B"/>
-                </a:solidFill>
-                <a:latin typeface="Arial" pitchFamily="34" charset="0"/>
-                <a:ea typeface="Arial" pitchFamily="34" charset="-122"/>
-                <a:cs typeface="Arial" pitchFamily="34" charset="-120"/>
-              </a:rPr>
-              <a:t>실용</a:t>
-            </a:r>
-            <a:endParaRPr lang="en-US" sz="1150" dirty="0"/>
-          </a:p>
-        </p:txBody>
-      </p:sp>
-      <p:sp>
-        <p:nvSpPr>
-          <p:cNvPr id="13" name="Shape 11"/>
-          <p:cNvSpPr/>
-          <p:nvPr/>
-        </p:nvSpPr>
-        <p:spPr>
-          <a:xfrm>
-            <a:off x="6223864" y="2194560"/>
-            <a:ext cx="2467280" cy="2286000"/>
+          <p:cNvPr id="11" name="Shape 9"/>
+          <p:cNvSpPr/>
+          <p:nvPr/>
+        </p:nvSpPr>
+        <p:spPr>
+          <a:xfrm>
+            <a:off x="2148840" y="4572000"/>
+            <a:ext cx="109728" cy="1097280"/>
           </a:xfrm>
           <a:prstGeom prst="roundRect">
             <a:avLst>
-              <a:gd name="adj" fmla="val 4000"/>
+              <a:gd name="adj" fmla="val 41667"/>
             </a:avLst>
           </a:prstGeom>
           <a:solidFill>
-            <a:srgbClr val="23262C"/>
+            <a:srgbClr val="3A3E45"/>
           </a:solidFill>
           <a:ln/>
         </p:spPr>
       </p:sp>
       <p:sp>
         <p:nvSpPr>
-          <p:cNvPr id="14" name="Text 12"/>
-          <p:cNvSpPr/>
-          <p:nvPr/>
-        </p:nvSpPr>
-        <p:spPr>
-          <a:xfrm>
-            <a:off x="6516472" y="2523744"/>
-            <a:ext cx="1882064" cy="384048"/>
-          </a:xfrm>
-          <a:prstGeom prst="rect">
-            <a:avLst/>
-          </a:prstGeom>
-          <a:noFill/>
-          <a:ln/>
-        </p:spPr>
-        <p:txBody>
-          <a:bodyPr wrap="square" lIns="0" tIns="0" rIns="0" bIns="0" rtlCol="0" anchor="ctr"/>
-          <a:lstStyle/>
-          <a:p>
-            <a:pPr indent="0" marL="0">
-              <a:buNone/>
-            </a:pPr>
-            <a:r>
-              <a:rPr lang="en-US" sz="1700" b="1" dirty="0">
-                <a:solidFill>
-                  <a:srgbClr val="FFFFFF"/>
-                </a:solidFill>
-                <a:latin typeface="Arial" pitchFamily="34" charset="0"/>
-                <a:ea typeface="Arial" pitchFamily="34" charset="-122"/>
-                <a:cs typeface="Arial" pitchFamily="34" charset="-120"/>
-              </a:rPr>
-              <a:t>악기 연습 카운터</a:t>
-            </a:r>
-            <a:endParaRPr lang="en-US" sz="1700" dirty="0"/>
-          </a:p>
-        </p:txBody>
-      </p:sp>
-      <p:sp>
-        <p:nvSpPr>
-          <p:cNvPr id="15" name="Text 13"/>
-          <p:cNvSpPr/>
-          <p:nvPr/>
-        </p:nvSpPr>
-        <p:spPr>
-          <a:xfrm>
-            <a:off x="6516472" y="2980944"/>
-            <a:ext cx="1882064" cy="914400"/>
-          </a:xfrm>
-          <a:prstGeom prst="rect">
-            <a:avLst/>
-          </a:prstGeom>
-          <a:noFill/>
-          <a:ln/>
-        </p:spPr>
-        <p:txBody>
-          <a:bodyPr wrap="square" lIns="0" tIns="0" rIns="0" bIns="0" rtlCol="0" anchor="t"/>
-          <a:lstStyle/>
-          <a:p>
-            <a:pPr indent="0" marL="0">
-              <a:lnSpc>
-                <a:spcPts val="1800"/>
-              </a:lnSpc>
-              <a:buNone/>
-            </a:pPr>
-            <a:r>
-              <a:rPr lang="en-US" sz="1250" dirty="0">
-                <a:solidFill>
-                  <a:srgbClr val="9AA0A6"/>
-                </a:solidFill>
-                <a:latin typeface="Arial" pitchFamily="34" charset="0"/>
-                <a:ea typeface="Arial" pitchFamily="34" charset="-122"/>
-                <a:cs typeface="Arial" pitchFamily="34" charset="-120"/>
-              </a:rPr>
-              <a:t>연습한 시간을 소리로 기록</a:t>
-            </a:r>
-            <a:endParaRPr lang="en-US" sz="1250" dirty="0"/>
-          </a:p>
-        </p:txBody>
-      </p:sp>
-      <p:sp>
-        <p:nvSpPr>
-          <p:cNvPr id="16" name="Text 14"/>
-          <p:cNvSpPr/>
-          <p:nvPr/>
-        </p:nvSpPr>
-        <p:spPr>
-          <a:xfrm>
-            <a:off x="6516472" y="3977640"/>
-            <a:ext cx="1882064" cy="274320"/>
-          </a:xfrm>
-          <a:prstGeom prst="rect">
-            <a:avLst/>
-          </a:prstGeom>
-          <a:noFill/>
-          <a:ln/>
-        </p:spPr>
-        <p:txBody>
-          <a:bodyPr wrap="square" lIns="0" tIns="0" rIns="0" bIns="0" rtlCol="0" anchor="ctr"/>
-          <a:lstStyle/>
-          <a:p>
-            <a:pPr indent="0" marL="0">
-              <a:buNone/>
-            </a:pPr>
-            <a:r>
-              <a:rPr lang="en-US" sz="1150" b="1" dirty="0">
-                <a:solidFill>
-                  <a:srgbClr val="EE4B2B"/>
-                </a:solidFill>
-                <a:latin typeface="Arial" pitchFamily="34" charset="0"/>
-                <a:ea typeface="Arial" pitchFamily="34" charset="-122"/>
-                <a:cs typeface="Arial" pitchFamily="34" charset="-120"/>
-              </a:rPr>
-              <a:t>기록</a:t>
-            </a:r>
-            <a:endParaRPr lang="en-US" sz="1150" dirty="0"/>
-          </a:p>
-        </p:txBody>
-      </p:sp>
-      <p:sp>
-        <p:nvSpPr>
-          <p:cNvPr id="17" name="Shape 15"/>
-          <p:cNvSpPr/>
-          <p:nvPr/>
-        </p:nvSpPr>
-        <p:spPr>
-          <a:xfrm>
-            <a:off x="8947175" y="2194560"/>
-            <a:ext cx="2467280" cy="2286000"/>
+          <p:cNvPr id="12" name="Shape 10"/>
+          <p:cNvSpPr/>
+          <p:nvPr/>
+        </p:nvSpPr>
+        <p:spPr>
+          <a:xfrm>
+            <a:off x="2423160" y="4846320"/>
+            <a:ext cx="109728" cy="548640"/>
           </a:xfrm>
           <a:prstGeom prst="roundRect">
             <a:avLst>
-              <a:gd name="adj" fmla="val 4000"/>
+              <a:gd name="adj" fmla="val 41667"/>
             </a:avLst>
           </a:prstGeom>
           <a:solidFill>
-            <a:srgbClr val="23262C"/>
+            <a:srgbClr val="EE4B2B"/>
           </a:solidFill>
           <a:ln/>
         </p:spPr>
       </p:sp>
       <p:sp>
         <p:nvSpPr>
+          <p:cNvPr id="13" name="Shape 11"/>
+          <p:cNvSpPr/>
+          <p:nvPr/>
+        </p:nvSpPr>
+        <p:spPr>
+          <a:xfrm>
+            <a:off x="2697480" y="4434840"/>
+            <a:ext cx="109728" cy="1371600"/>
+          </a:xfrm>
+          <a:prstGeom prst="roundRect">
+            <a:avLst>
+              <a:gd name="adj" fmla="val 41667"/>
+            </a:avLst>
+          </a:prstGeom>
+          <a:solidFill>
+            <a:srgbClr val="3A3E45"/>
+          </a:solidFill>
+          <a:ln/>
+        </p:spPr>
+      </p:sp>
+      <p:sp>
+        <p:nvSpPr>
+          <p:cNvPr id="14" name="Shape 12"/>
+          <p:cNvSpPr/>
+          <p:nvPr/>
+        </p:nvSpPr>
+        <p:spPr>
+          <a:xfrm>
+            <a:off x="2971800" y="4709160"/>
+            <a:ext cx="109728" cy="822960"/>
+          </a:xfrm>
+          <a:prstGeom prst="roundRect">
+            <a:avLst>
+              <a:gd name="adj" fmla="val 41667"/>
+            </a:avLst>
+          </a:prstGeom>
+          <a:solidFill>
+            <a:srgbClr val="3A3E45"/>
+          </a:solidFill>
+          <a:ln/>
+        </p:spPr>
+      </p:sp>
+      <p:sp>
+        <p:nvSpPr>
+          <p:cNvPr id="15" name="Shape 13"/>
+          <p:cNvSpPr/>
+          <p:nvPr/>
+        </p:nvSpPr>
+        <p:spPr>
+          <a:xfrm>
+            <a:off x="3246120" y="4937760"/>
+            <a:ext cx="109728" cy="365760"/>
+          </a:xfrm>
+          <a:prstGeom prst="roundRect">
+            <a:avLst>
+              <a:gd name="adj" fmla="val 41667"/>
+            </a:avLst>
+          </a:prstGeom>
+          <a:solidFill>
+            <a:srgbClr val="3A3E45"/>
+          </a:solidFill>
+          <a:ln/>
+        </p:spPr>
+      </p:sp>
+      <p:sp>
+        <p:nvSpPr>
+          <p:cNvPr id="16" name="Shape 14"/>
+          <p:cNvSpPr/>
+          <p:nvPr/>
+        </p:nvSpPr>
+        <p:spPr>
+          <a:xfrm>
+            <a:off x="3520440" y="4617720"/>
+            <a:ext cx="109728" cy="1005840"/>
+          </a:xfrm>
+          <a:prstGeom prst="roundRect">
+            <a:avLst>
+              <a:gd name="adj" fmla="val 41667"/>
+            </a:avLst>
+          </a:prstGeom>
+          <a:solidFill>
+            <a:srgbClr val="EE4B2B"/>
+          </a:solidFill>
+          <a:ln/>
+        </p:spPr>
+      </p:sp>
+      <p:sp>
+        <p:nvSpPr>
+          <p:cNvPr id="17" name="Shape 15"/>
+          <p:cNvSpPr/>
+          <p:nvPr/>
+        </p:nvSpPr>
+        <p:spPr>
+          <a:xfrm>
+            <a:off x="3794760" y="4800600"/>
+            <a:ext cx="109728" cy="640080"/>
+          </a:xfrm>
+          <a:prstGeom prst="roundRect">
+            <a:avLst>
+              <a:gd name="adj" fmla="val 41667"/>
+            </a:avLst>
+          </a:prstGeom>
+          <a:solidFill>
+            <a:srgbClr val="3A3E45"/>
+          </a:solidFill>
+          <a:ln/>
+        </p:spPr>
+      </p:sp>
+      <p:sp>
+        <p:nvSpPr>
           <p:cNvPr id="18" name="Text 16"/>
-          <p:cNvSpPr/>
-          <p:nvPr/>
-        </p:nvSpPr>
-        <p:spPr>
-          <a:xfrm>
-            <a:off x="9239783" y="2523744"/>
-            <a:ext cx="1882064" cy="384048"/>
-          </a:xfrm>
-          <a:prstGeom prst="rect">
-            <a:avLst/>
-          </a:prstGeom>
-          <a:noFill/>
-          <a:ln/>
-        </p:spPr>
-        <p:txBody>
-          <a:bodyPr wrap="square" lIns="0" tIns="0" rIns="0" bIns="0" rtlCol="0" anchor="ctr"/>
-          <a:lstStyle/>
-          <a:p>
-            <a:pPr indent="0" marL="0">
-              <a:buNone/>
-            </a:pPr>
-            <a:r>
-              <a:rPr lang="en-US" sz="1700" b="1" dirty="0">
-                <a:solidFill>
-                  <a:srgbClr val="FFFFFF"/>
-                </a:solidFill>
-                <a:latin typeface="Arial" pitchFamily="34" charset="0"/>
-                <a:ea typeface="Arial" pitchFamily="34" charset="-122"/>
-                <a:cs typeface="Arial" pitchFamily="34" charset="-120"/>
-              </a:rPr>
-              <a:t>고양이 통역기</a:t>
-            </a:r>
-            <a:endParaRPr lang="en-US" sz="1700" dirty="0"/>
-          </a:p>
-        </p:txBody>
-      </p:sp>
-      <p:sp>
-        <p:nvSpPr>
-          <p:cNvPr id="19" name="Text 17"/>
-          <p:cNvSpPr/>
-          <p:nvPr/>
-        </p:nvSpPr>
-        <p:spPr>
-          <a:xfrm>
-            <a:off x="9239783" y="2980944"/>
-            <a:ext cx="1882064" cy="914400"/>
-          </a:xfrm>
-          <a:prstGeom prst="rect">
-            <a:avLst/>
-          </a:prstGeom>
-          <a:noFill/>
-          <a:ln/>
-        </p:spPr>
-        <p:txBody>
-          <a:bodyPr wrap="square" lIns="0" tIns="0" rIns="0" bIns="0" rtlCol="0" anchor="t"/>
-          <a:lstStyle/>
-          <a:p>
-            <a:pPr indent="0" marL="0">
-              <a:lnSpc>
-                <a:spcPts val="1800"/>
-              </a:lnSpc>
-              <a:buNone/>
-            </a:pPr>
-            <a:r>
-              <a:rPr lang="en-US" sz="1250" dirty="0">
-                <a:solidFill>
-                  <a:srgbClr val="9AA0A6"/>
-                </a:solidFill>
-                <a:latin typeface="Arial" pitchFamily="34" charset="0"/>
-                <a:ea typeface="Arial" pitchFamily="34" charset="-122"/>
-                <a:cs typeface="Arial" pitchFamily="34" charset="-120"/>
-              </a:rPr>
-              <a:t>울음 패턴 3종 분류</a:t>
-            </a:r>
-            <a:endParaRPr lang="en-US" sz="1250" dirty="0"/>
-          </a:p>
-        </p:txBody>
-      </p:sp>
-      <p:sp>
-        <p:nvSpPr>
-          <p:cNvPr id="20" name="Text 18"/>
-          <p:cNvSpPr/>
-          <p:nvPr/>
-        </p:nvSpPr>
-        <p:spPr>
-          <a:xfrm>
-            <a:off x="9239783" y="3977640"/>
-            <a:ext cx="1882064" cy="274320"/>
-          </a:xfrm>
-          <a:prstGeom prst="rect">
-            <a:avLst/>
-          </a:prstGeom>
-          <a:noFill/>
-          <a:ln/>
-        </p:spPr>
-        <p:txBody>
-          <a:bodyPr wrap="square" lIns="0" tIns="0" rIns="0" bIns="0" rtlCol="0" anchor="ctr"/>
-          <a:lstStyle/>
-          <a:p>
-            <a:pPr indent="0" marL="0">
-              <a:buNone/>
-            </a:pPr>
-            <a:r>
-              <a:rPr lang="en-US" sz="1150" b="1" dirty="0">
-                <a:solidFill>
-                  <a:srgbClr val="EE4B2B"/>
-                </a:solidFill>
-                <a:latin typeface="Arial" pitchFamily="34" charset="0"/>
-                <a:ea typeface="Arial" pitchFamily="34" charset="-122"/>
-                <a:cs typeface="Arial" pitchFamily="34" charset="-120"/>
-              </a:rPr>
-              <a:t>재미</a:t>
-            </a:r>
-            <a:endParaRPr lang="en-US" sz="1150" dirty="0"/>
-          </a:p>
-        </p:txBody>
-      </p:sp>
-      <p:sp>
-        <p:nvSpPr>
-          <p:cNvPr id="21" name="Text 19"/>
-          <p:cNvSpPr/>
-          <p:nvPr/>
-        </p:nvSpPr>
-        <p:spPr>
-          <a:xfrm>
-            <a:off x="777240" y="4937760"/>
-            <a:ext cx="10637215" cy="548640"/>
-          </a:xfrm>
-          <a:prstGeom prst="rect">
-            <a:avLst/>
-          </a:prstGeom>
-          <a:noFill/>
-          <a:ln/>
-        </p:spPr>
-        <p:txBody>
-          <a:bodyPr wrap="square" lIns="0" tIns="0" rIns="0" bIns="0" rtlCol="0" anchor="t"/>
-          <a:lstStyle/>
-          <a:p>
-            <a:pPr indent="0" marL="0">
-              <a:buNone/>
-            </a:pPr>
-            <a:r>
-              <a:rPr lang="en-US" sz="1400" b="1" dirty="0">
-                <a:solidFill>
-                  <a:srgbClr val="EE4B2B"/>
-                </a:solidFill>
-                <a:latin typeface="Arial" pitchFamily="34" charset="0"/>
-                <a:ea typeface="Arial" pitchFamily="34" charset="-122"/>
-                <a:cs typeface="Arial" pitchFamily="34" charset="-120"/>
-              </a:rPr>
-              <a:t>모델은 Create ML로 15분 — 나머지는 여러분의 바이브 코딩. 다음 미팅 팀 공유 시간에 시연합니다.</a:t>
-            </a:r>
-            <a:endParaRPr lang="en-US" sz="1400" dirty="0"/>
-          </a:p>
-        </p:txBody>
-      </p:sp>
-      <p:sp>
-        <p:nvSpPr>
-          <p:cNvPr id="22" name="Text 20"/>
           <p:cNvSpPr/>
           <p:nvPr/>
         </p:nvSpPr>
@@ -20888,7 +21673,7 @@
       </p:sp>
       <p:sp>
         <p:nvSpPr>
-          <p:cNvPr id="23" name="Text 21"/>
+          <p:cNvPr id="19" name="Text 17"/>
           <p:cNvSpPr/>
           <p:nvPr/>
         </p:nvSpPr>
@@ -20919,7 +21704,7 @@
                 <a:ea typeface="Arial" pitchFamily="34" charset="-122"/>
                 <a:cs typeface="Arial" pitchFamily="34" charset="-120"/>
               </a:rPr>
-              <a:t>30</a:t>
+              <a:t>31</a:t>
             </a:r>
             <a:endParaRPr lang="en-US" sz="900" dirty="0"/>
           </a:p>
@@ -20933,9 +21718,824 @@
 </p:sld>
 </file>
 
-<file path=ppt/slides/slide43.xml><?xml version="1.0" encoding="utf-8"?>
+<file path=ppt/slides/slide44.xml><?xml version="1.0" encoding="utf-8"?>
 <p:sld xmlns:a="http://schemas.openxmlformats.org/drawingml/2006/main" xmlns:r="http://schemas.openxmlformats.org/officeDocument/2006/relationships" xmlns:p="http://schemas.openxmlformats.org/presentationml/2006/main">
-  <p:cSld name="Slide 43">
+  <p:cSld name="Slide 44">
+    <p:bg>
+      <p:bgPr>
+        <a:solidFill>
+          <a:srgbClr val="16181D"/>
+        </a:solidFill>
+      </p:bgPr>
+    </p:bg>
+    <p:spTree>
+      <p:nvGrpSpPr>
+        <p:cNvPr id="1" name=""/>
+        <p:cNvGrpSpPr/>
+        <p:nvPr/>
+      </p:nvGrpSpPr>
+      <p:grpSpPr>
+        <a:xfrm>
+          <a:off x="0" y="0"/>
+          <a:ext cx="0" cy="0"/>
+          <a:chOff x="0" y="0"/>
+          <a:chExt cx="0" cy="0"/>
+        </a:xfrm>
+      </p:grpSpPr>
+      <p:sp>
+        <p:nvSpPr>
+          <p:cNvPr id="2" name="Shape 0"/>
+          <p:cNvSpPr/>
+          <p:nvPr/>
+        </p:nvSpPr>
+        <p:spPr>
+          <a:xfrm>
+            <a:off x="777240" y="621792"/>
+            <a:ext cx="91440" cy="91440"/>
+          </a:xfrm>
+          <a:prstGeom prst="ellipse">
+            <a:avLst/>
+          </a:prstGeom>
+          <a:solidFill>
+            <a:srgbClr val="EE4B2B"/>
+          </a:solidFill>
+          <a:ln/>
+        </p:spPr>
+      </p:sp>
+      <p:sp>
+        <p:nvSpPr>
+          <p:cNvPr id="3" name="Text 1"/>
+          <p:cNvSpPr/>
+          <p:nvPr/>
+        </p:nvSpPr>
+        <p:spPr>
+          <a:xfrm>
+            <a:off x="960120" y="530352"/>
+            <a:ext cx="8229600" cy="274320"/>
+          </a:xfrm>
+          <a:prstGeom prst="rect">
+            <a:avLst/>
+          </a:prstGeom>
+          <a:noFill/>
+          <a:ln/>
+        </p:spPr>
+        <p:txBody>
+          <a:bodyPr wrap="square" lIns="0" tIns="0" rIns="0" bIns="0" rtlCol="0" anchor="ctr"/>
+          <a:lstStyle/>
+          <a:p>
+            <a:pPr indent="0" marL="0">
+              <a:buNone/>
+            </a:pPr>
+            <a:r>
+              <a:rPr lang="en-US" sz="1100" b="1" spc="250" kern="0" dirty="0">
+                <a:solidFill>
+                  <a:srgbClr val="EE4B2B"/>
+                </a:solidFill>
+                <a:latin typeface="Arial" pitchFamily="34" charset="0"/>
+                <a:ea typeface="Arial" pitchFamily="34" charset="-122"/>
+                <a:cs typeface="Arial" pitchFamily="34" charset="-120"/>
+              </a:rPr>
+              <a:t>TEAM MISSION</a:t>
+            </a:r>
+            <a:endParaRPr lang="en-US" sz="1100" dirty="0"/>
+          </a:p>
+        </p:txBody>
+      </p:sp>
+      <p:sp>
+        <p:nvSpPr>
+          <p:cNvPr id="4" name="Text 2"/>
+          <p:cNvSpPr/>
+          <p:nvPr/>
+        </p:nvSpPr>
+        <p:spPr>
+          <a:xfrm>
+            <a:off x="777240" y="896112"/>
+            <a:ext cx="10637215" cy="548640"/>
+          </a:xfrm>
+          <a:prstGeom prst="rect">
+            <a:avLst/>
+          </a:prstGeom>
+          <a:noFill/>
+          <a:ln/>
+        </p:spPr>
+        <p:txBody>
+          <a:bodyPr wrap="square" lIns="0" tIns="0" rIns="0" bIns="0" rtlCol="0" anchor="ctr"/>
+          <a:lstStyle/>
+          <a:p>
+            <a:pPr indent="0" marL="0">
+              <a:buNone/>
+            </a:pPr>
+            <a:r>
+              <a:rPr lang="en-US" sz="3000" b="1" dirty="0">
+                <a:solidFill>
+                  <a:srgbClr val="FFFFFF"/>
+                </a:solidFill>
+                <a:latin typeface="Arial" pitchFamily="34" charset="0"/>
+                <a:ea typeface="Arial" pitchFamily="34" charset="-122"/>
+                <a:cs typeface="Arial" pitchFamily="34" charset="-120"/>
+              </a:rPr>
+              <a:t>다음 주까지: 소리로 반응하는 앱 하나</a:t>
+            </a:r>
+            <a:endParaRPr lang="en-US" sz="3000" dirty="0"/>
+          </a:p>
+        </p:txBody>
+      </p:sp>
+      <p:sp>
+        <p:nvSpPr>
+          <p:cNvPr id="5" name="Shape 3"/>
+          <p:cNvSpPr/>
+          <p:nvPr/>
+        </p:nvSpPr>
+        <p:spPr>
+          <a:xfrm>
+            <a:off x="777240" y="2194560"/>
+            <a:ext cx="2467280" cy="2286000"/>
+          </a:xfrm>
+          <a:prstGeom prst="roundRect">
+            <a:avLst>
+              <a:gd name="adj" fmla="val 4000"/>
+            </a:avLst>
+          </a:prstGeom>
+          <a:solidFill>
+            <a:srgbClr val="23262C"/>
+          </a:solidFill>
+          <a:ln/>
+        </p:spPr>
+      </p:sp>
+      <p:sp>
+        <p:nvSpPr>
+          <p:cNvPr id="6" name="Text 4"/>
+          <p:cNvSpPr/>
+          <p:nvPr/>
+        </p:nvSpPr>
+        <p:spPr>
+          <a:xfrm>
+            <a:off x="1069848" y="2523744"/>
+            <a:ext cx="1882064" cy="384048"/>
+          </a:xfrm>
+          <a:prstGeom prst="rect">
+            <a:avLst/>
+          </a:prstGeom>
+          <a:noFill/>
+          <a:ln/>
+        </p:spPr>
+        <p:txBody>
+          <a:bodyPr wrap="square" lIns="0" tIns="0" rIns="0" bIns="0" rtlCol="0" anchor="ctr"/>
+          <a:lstStyle/>
+          <a:p>
+            <a:pPr indent="0" marL="0">
+              <a:buNone/>
+            </a:pPr>
+            <a:r>
+              <a:rPr lang="en-US" sz="1700" b="1" dirty="0">
+                <a:solidFill>
+                  <a:srgbClr val="FFFFFF"/>
+                </a:solidFill>
+                <a:latin typeface="Arial" pitchFamily="34" charset="0"/>
+                <a:ea typeface="Arial" pitchFamily="34" charset="-122"/>
+                <a:cs typeface="Arial" pitchFamily="34" charset="-120"/>
+              </a:rPr>
+              <a:t>박수 게임</a:t>
+            </a:r>
+            <a:endParaRPr lang="en-US" sz="1700" dirty="0"/>
+          </a:p>
+        </p:txBody>
+      </p:sp>
+      <p:sp>
+        <p:nvSpPr>
+          <p:cNvPr id="7" name="Text 5"/>
+          <p:cNvSpPr/>
+          <p:nvPr/>
+        </p:nvSpPr>
+        <p:spPr>
+          <a:xfrm>
+            <a:off x="1069848" y="2980944"/>
+            <a:ext cx="1882064" cy="914400"/>
+          </a:xfrm>
+          <a:prstGeom prst="rect">
+            <a:avLst/>
+          </a:prstGeom>
+          <a:noFill/>
+          <a:ln/>
+        </p:spPr>
+        <p:txBody>
+          <a:bodyPr wrap="square" lIns="0" tIns="0" rIns="0" bIns="0" rtlCol="0" anchor="t"/>
+          <a:lstStyle/>
+          <a:p>
+            <a:pPr indent="0" marL="0">
+              <a:lnSpc>
+                <a:spcPts val="1800"/>
+              </a:lnSpc>
+              <a:buNone/>
+            </a:pPr>
+            <a:r>
+              <a:rPr lang="en-US" sz="1250" dirty="0">
+                <a:solidFill>
+                  <a:srgbClr val="9AA0A6"/>
+                </a:solidFill>
+                <a:latin typeface="Arial" pitchFamily="34" charset="0"/>
+                <a:ea typeface="Arial" pitchFamily="34" charset="-122"/>
+                <a:cs typeface="Arial" pitchFamily="34" charset="-120"/>
+              </a:rPr>
+              <a:t>오늘 모델 그대로 + 게임 로직만</a:t>
+            </a:r>
+            <a:endParaRPr lang="en-US" sz="1250" dirty="0"/>
+          </a:p>
+        </p:txBody>
+      </p:sp>
+      <p:sp>
+        <p:nvSpPr>
+          <p:cNvPr id="8" name="Text 6"/>
+          <p:cNvSpPr/>
+          <p:nvPr/>
+        </p:nvSpPr>
+        <p:spPr>
+          <a:xfrm>
+            <a:off x="1069848" y="3977640"/>
+            <a:ext cx="1882064" cy="274320"/>
+          </a:xfrm>
+          <a:prstGeom prst="rect">
+            <a:avLst/>
+          </a:prstGeom>
+          <a:noFill/>
+          <a:ln/>
+        </p:spPr>
+        <p:txBody>
+          <a:bodyPr wrap="square" lIns="0" tIns="0" rIns="0" bIns="0" rtlCol="0" anchor="ctr"/>
+          <a:lstStyle/>
+          <a:p>
+            <a:pPr indent="0" marL="0">
+              <a:buNone/>
+            </a:pPr>
+            <a:r>
+              <a:rPr lang="en-US" sz="1150" b="1" dirty="0">
+                <a:solidFill>
+                  <a:srgbClr val="EE4B2B"/>
+                </a:solidFill>
+                <a:latin typeface="Arial" pitchFamily="34" charset="0"/>
+                <a:ea typeface="Arial" pitchFamily="34" charset="-122"/>
+                <a:cs typeface="Arial" pitchFamily="34" charset="-120"/>
+              </a:rPr>
+              <a:t>최단 경로</a:t>
+            </a:r>
+            <a:endParaRPr lang="en-US" sz="1150" dirty="0"/>
+          </a:p>
+        </p:txBody>
+      </p:sp>
+      <p:sp>
+        <p:nvSpPr>
+          <p:cNvPr id="9" name="Shape 7"/>
+          <p:cNvSpPr/>
+          <p:nvPr/>
+        </p:nvSpPr>
+        <p:spPr>
+          <a:xfrm>
+            <a:off x="3500552" y="2194560"/>
+            <a:ext cx="2467280" cy="2286000"/>
+          </a:xfrm>
+          <a:prstGeom prst="roundRect">
+            <a:avLst>
+              <a:gd name="adj" fmla="val 4000"/>
+            </a:avLst>
+          </a:prstGeom>
+          <a:solidFill>
+            <a:srgbClr val="23262C"/>
+          </a:solidFill>
+          <a:ln/>
+        </p:spPr>
+      </p:sp>
+      <p:sp>
+        <p:nvSpPr>
+          <p:cNvPr id="10" name="Text 8"/>
+          <p:cNvSpPr/>
+          <p:nvPr/>
+        </p:nvSpPr>
+        <p:spPr>
+          <a:xfrm>
+            <a:off x="3793160" y="2523744"/>
+            <a:ext cx="1882064" cy="384048"/>
+          </a:xfrm>
+          <a:prstGeom prst="rect">
+            <a:avLst/>
+          </a:prstGeom>
+          <a:noFill/>
+          <a:ln/>
+        </p:spPr>
+        <p:txBody>
+          <a:bodyPr wrap="square" lIns="0" tIns="0" rIns="0" bIns="0" rtlCol="0" anchor="ctr"/>
+          <a:lstStyle/>
+          <a:p>
+            <a:pPr indent="0" marL="0">
+              <a:buNone/>
+            </a:pPr>
+            <a:r>
+              <a:rPr lang="en-US" sz="1700" b="1" dirty="0">
+                <a:solidFill>
+                  <a:srgbClr val="FFFFFF"/>
+                </a:solidFill>
+                <a:latin typeface="Arial" pitchFamily="34" charset="0"/>
+                <a:ea typeface="Arial" pitchFamily="34" charset="-122"/>
+                <a:cs typeface="Arial" pitchFamily="34" charset="-120"/>
+              </a:rPr>
+              <a:t>우리 집 소리 알림</a:t>
+            </a:r>
+            <a:endParaRPr lang="en-US" sz="1700" dirty="0"/>
+          </a:p>
+        </p:txBody>
+      </p:sp>
+      <p:sp>
+        <p:nvSpPr>
+          <p:cNvPr id="11" name="Text 9"/>
+          <p:cNvSpPr/>
+          <p:nvPr/>
+        </p:nvSpPr>
+        <p:spPr>
+          <a:xfrm>
+            <a:off x="3793160" y="2980944"/>
+            <a:ext cx="1882064" cy="914400"/>
+          </a:xfrm>
+          <a:prstGeom prst="rect">
+            <a:avLst/>
+          </a:prstGeom>
+          <a:noFill/>
+          <a:ln/>
+        </p:spPr>
+        <p:txBody>
+          <a:bodyPr wrap="square" lIns="0" tIns="0" rIns="0" bIns="0" rtlCol="0" anchor="t"/>
+          <a:lstStyle/>
+          <a:p>
+            <a:pPr indent="0" marL="0">
+              <a:lnSpc>
+                <a:spcPts val="1800"/>
+              </a:lnSpc>
+              <a:buNone/>
+            </a:pPr>
+            <a:r>
+              <a:rPr lang="en-US" sz="1250" dirty="0">
+                <a:solidFill>
+                  <a:srgbClr val="9AA0A6"/>
+                </a:solidFill>
+                <a:latin typeface="Arial" pitchFamily="34" charset="0"/>
+                <a:ea typeface="Arial" pitchFamily="34" charset="-122"/>
+                <a:cs typeface="Arial" pitchFamily="34" charset="-120"/>
+              </a:rPr>
+              <a:t>초인종·주전자·세탁기 종료음</a:t>
+            </a:r>
+            <a:endParaRPr lang="en-US" sz="1250" dirty="0"/>
+          </a:p>
+        </p:txBody>
+      </p:sp>
+      <p:sp>
+        <p:nvSpPr>
+          <p:cNvPr id="12" name="Text 10"/>
+          <p:cNvSpPr/>
+          <p:nvPr/>
+        </p:nvSpPr>
+        <p:spPr>
+          <a:xfrm>
+            <a:off x="3793160" y="3977640"/>
+            <a:ext cx="1882064" cy="274320"/>
+          </a:xfrm>
+          <a:prstGeom prst="rect">
+            <a:avLst/>
+          </a:prstGeom>
+          <a:noFill/>
+          <a:ln/>
+        </p:spPr>
+        <p:txBody>
+          <a:bodyPr wrap="square" lIns="0" tIns="0" rIns="0" bIns="0" rtlCol="0" anchor="ctr"/>
+          <a:lstStyle/>
+          <a:p>
+            <a:pPr indent="0" marL="0">
+              <a:buNone/>
+            </a:pPr>
+            <a:r>
+              <a:rPr lang="en-US" sz="1150" b="1" dirty="0">
+                <a:solidFill>
+                  <a:srgbClr val="EE4B2B"/>
+                </a:solidFill>
+                <a:latin typeface="Arial" pitchFamily="34" charset="0"/>
+                <a:ea typeface="Arial" pitchFamily="34" charset="-122"/>
+                <a:cs typeface="Arial" pitchFamily="34" charset="-120"/>
+              </a:rPr>
+              <a:t>실용</a:t>
+            </a:r>
+            <a:endParaRPr lang="en-US" sz="1150" dirty="0"/>
+          </a:p>
+        </p:txBody>
+      </p:sp>
+      <p:sp>
+        <p:nvSpPr>
+          <p:cNvPr id="13" name="Shape 11"/>
+          <p:cNvSpPr/>
+          <p:nvPr/>
+        </p:nvSpPr>
+        <p:spPr>
+          <a:xfrm>
+            <a:off x="6223864" y="2194560"/>
+            <a:ext cx="2467280" cy="2286000"/>
+          </a:xfrm>
+          <a:prstGeom prst="roundRect">
+            <a:avLst>
+              <a:gd name="adj" fmla="val 4000"/>
+            </a:avLst>
+          </a:prstGeom>
+          <a:solidFill>
+            <a:srgbClr val="23262C"/>
+          </a:solidFill>
+          <a:ln/>
+        </p:spPr>
+      </p:sp>
+      <p:sp>
+        <p:nvSpPr>
+          <p:cNvPr id="14" name="Text 12"/>
+          <p:cNvSpPr/>
+          <p:nvPr/>
+        </p:nvSpPr>
+        <p:spPr>
+          <a:xfrm>
+            <a:off x="6516472" y="2523744"/>
+            <a:ext cx="1882064" cy="384048"/>
+          </a:xfrm>
+          <a:prstGeom prst="rect">
+            <a:avLst/>
+          </a:prstGeom>
+          <a:noFill/>
+          <a:ln/>
+        </p:spPr>
+        <p:txBody>
+          <a:bodyPr wrap="square" lIns="0" tIns="0" rIns="0" bIns="0" rtlCol="0" anchor="ctr"/>
+          <a:lstStyle/>
+          <a:p>
+            <a:pPr indent="0" marL="0">
+              <a:buNone/>
+            </a:pPr>
+            <a:r>
+              <a:rPr lang="en-US" sz="1700" b="1" dirty="0">
+                <a:solidFill>
+                  <a:srgbClr val="FFFFFF"/>
+                </a:solidFill>
+                <a:latin typeface="Arial" pitchFamily="34" charset="0"/>
+                <a:ea typeface="Arial" pitchFamily="34" charset="-122"/>
+                <a:cs typeface="Arial" pitchFamily="34" charset="-120"/>
+              </a:rPr>
+              <a:t>악기 연습 카운터</a:t>
+            </a:r>
+            <a:endParaRPr lang="en-US" sz="1700" dirty="0"/>
+          </a:p>
+        </p:txBody>
+      </p:sp>
+      <p:sp>
+        <p:nvSpPr>
+          <p:cNvPr id="15" name="Text 13"/>
+          <p:cNvSpPr/>
+          <p:nvPr/>
+        </p:nvSpPr>
+        <p:spPr>
+          <a:xfrm>
+            <a:off x="6516472" y="2980944"/>
+            <a:ext cx="1882064" cy="914400"/>
+          </a:xfrm>
+          <a:prstGeom prst="rect">
+            <a:avLst/>
+          </a:prstGeom>
+          <a:noFill/>
+          <a:ln/>
+        </p:spPr>
+        <p:txBody>
+          <a:bodyPr wrap="square" lIns="0" tIns="0" rIns="0" bIns="0" rtlCol="0" anchor="t"/>
+          <a:lstStyle/>
+          <a:p>
+            <a:pPr indent="0" marL="0">
+              <a:lnSpc>
+                <a:spcPts val="1800"/>
+              </a:lnSpc>
+              <a:buNone/>
+            </a:pPr>
+            <a:r>
+              <a:rPr lang="en-US" sz="1250" dirty="0">
+                <a:solidFill>
+                  <a:srgbClr val="9AA0A6"/>
+                </a:solidFill>
+                <a:latin typeface="Arial" pitchFamily="34" charset="0"/>
+                <a:ea typeface="Arial" pitchFamily="34" charset="-122"/>
+                <a:cs typeface="Arial" pitchFamily="34" charset="-120"/>
+              </a:rPr>
+              <a:t>연습한 시간을 소리로 기록</a:t>
+            </a:r>
+            <a:endParaRPr lang="en-US" sz="1250" dirty="0"/>
+          </a:p>
+        </p:txBody>
+      </p:sp>
+      <p:sp>
+        <p:nvSpPr>
+          <p:cNvPr id="16" name="Text 14"/>
+          <p:cNvSpPr/>
+          <p:nvPr/>
+        </p:nvSpPr>
+        <p:spPr>
+          <a:xfrm>
+            <a:off x="6516472" y="3977640"/>
+            <a:ext cx="1882064" cy="274320"/>
+          </a:xfrm>
+          <a:prstGeom prst="rect">
+            <a:avLst/>
+          </a:prstGeom>
+          <a:noFill/>
+          <a:ln/>
+        </p:spPr>
+        <p:txBody>
+          <a:bodyPr wrap="square" lIns="0" tIns="0" rIns="0" bIns="0" rtlCol="0" anchor="ctr"/>
+          <a:lstStyle/>
+          <a:p>
+            <a:pPr indent="0" marL="0">
+              <a:buNone/>
+            </a:pPr>
+            <a:r>
+              <a:rPr lang="en-US" sz="1150" b="1" dirty="0">
+                <a:solidFill>
+                  <a:srgbClr val="EE4B2B"/>
+                </a:solidFill>
+                <a:latin typeface="Arial" pitchFamily="34" charset="0"/>
+                <a:ea typeface="Arial" pitchFamily="34" charset="-122"/>
+                <a:cs typeface="Arial" pitchFamily="34" charset="-120"/>
+              </a:rPr>
+              <a:t>기록</a:t>
+            </a:r>
+            <a:endParaRPr lang="en-US" sz="1150" dirty="0"/>
+          </a:p>
+        </p:txBody>
+      </p:sp>
+      <p:sp>
+        <p:nvSpPr>
+          <p:cNvPr id="17" name="Shape 15"/>
+          <p:cNvSpPr/>
+          <p:nvPr/>
+        </p:nvSpPr>
+        <p:spPr>
+          <a:xfrm>
+            <a:off x="8947175" y="2194560"/>
+            <a:ext cx="2467280" cy="2286000"/>
+          </a:xfrm>
+          <a:prstGeom prst="roundRect">
+            <a:avLst>
+              <a:gd name="adj" fmla="val 4000"/>
+            </a:avLst>
+          </a:prstGeom>
+          <a:solidFill>
+            <a:srgbClr val="23262C"/>
+          </a:solidFill>
+          <a:ln/>
+        </p:spPr>
+      </p:sp>
+      <p:sp>
+        <p:nvSpPr>
+          <p:cNvPr id="18" name="Text 16"/>
+          <p:cNvSpPr/>
+          <p:nvPr/>
+        </p:nvSpPr>
+        <p:spPr>
+          <a:xfrm>
+            <a:off x="9239783" y="2523744"/>
+            <a:ext cx="1882064" cy="384048"/>
+          </a:xfrm>
+          <a:prstGeom prst="rect">
+            <a:avLst/>
+          </a:prstGeom>
+          <a:noFill/>
+          <a:ln/>
+        </p:spPr>
+        <p:txBody>
+          <a:bodyPr wrap="square" lIns="0" tIns="0" rIns="0" bIns="0" rtlCol="0" anchor="ctr"/>
+          <a:lstStyle/>
+          <a:p>
+            <a:pPr indent="0" marL="0">
+              <a:buNone/>
+            </a:pPr>
+            <a:r>
+              <a:rPr lang="en-US" sz="1700" b="1" dirty="0">
+                <a:solidFill>
+                  <a:srgbClr val="FFFFFF"/>
+                </a:solidFill>
+                <a:latin typeface="Arial" pitchFamily="34" charset="0"/>
+                <a:ea typeface="Arial" pitchFamily="34" charset="-122"/>
+                <a:cs typeface="Arial" pitchFamily="34" charset="-120"/>
+              </a:rPr>
+              <a:t>고양이 통역기</a:t>
+            </a:r>
+            <a:endParaRPr lang="en-US" sz="1700" dirty="0"/>
+          </a:p>
+        </p:txBody>
+      </p:sp>
+      <p:sp>
+        <p:nvSpPr>
+          <p:cNvPr id="19" name="Text 17"/>
+          <p:cNvSpPr/>
+          <p:nvPr/>
+        </p:nvSpPr>
+        <p:spPr>
+          <a:xfrm>
+            <a:off x="9239783" y="2980944"/>
+            <a:ext cx="1882064" cy="914400"/>
+          </a:xfrm>
+          <a:prstGeom prst="rect">
+            <a:avLst/>
+          </a:prstGeom>
+          <a:noFill/>
+          <a:ln/>
+        </p:spPr>
+        <p:txBody>
+          <a:bodyPr wrap="square" lIns="0" tIns="0" rIns="0" bIns="0" rtlCol="0" anchor="t"/>
+          <a:lstStyle/>
+          <a:p>
+            <a:pPr indent="0" marL="0">
+              <a:lnSpc>
+                <a:spcPts val="1800"/>
+              </a:lnSpc>
+              <a:buNone/>
+            </a:pPr>
+            <a:r>
+              <a:rPr lang="en-US" sz="1250" dirty="0">
+                <a:solidFill>
+                  <a:srgbClr val="9AA0A6"/>
+                </a:solidFill>
+                <a:latin typeface="Arial" pitchFamily="34" charset="0"/>
+                <a:ea typeface="Arial" pitchFamily="34" charset="-122"/>
+                <a:cs typeface="Arial" pitchFamily="34" charset="-120"/>
+              </a:rPr>
+              <a:t>울음 패턴 3종 분류</a:t>
+            </a:r>
+            <a:endParaRPr lang="en-US" sz="1250" dirty="0"/>
+          </a:p>
+        </p:txBody>
+      </p:sp>
+      <p:sp>
+        <p:nvSpPr>
+          <p:cNvPr id="20" name="Text 18"/>
+          <p:cNvSpPr/>
+          <p:nvPr/>
+        </p:nvSpPr>
+        <p:spPr>
+          <a:xfrm>
+            <a:off x="9239783" y="3977640"/>
+            <a:ext cx="1882064" cy="274320"/>
+          </a:xfrm>
+          <a:prstGeom prst="rect">
+            <a:avLst/>
+          </a:prstGeom>
+          <a:noFill/>
+          <a:ln/>
+        </p:spPr>
+        <p:txBody>
+          <a:bodyPr wrap="square" lIns="0" tIns="0" rIns="0" bIns="0" rtlCol="0" anchor="ctr"/>
+          <a:lstStyle/>
+          <a:p>
+            <a:pPr indent="0" marL="0">
+              <a:buNone/>
+            </a:pPr>
+            <a:r>
+              <a:rPr lang="en-US" sz="1150" b="1" dirty="0">
+                <a:solidFill>
+                  <a:srgbClr val="EE4B2B"/>
+                </a:solidFill>
+                <a:latin typeface="Arial" pitchFamily="34" charset="0"/>
+                <a:ea typeface="Arial" pitchFamily="34" charset="-122"/>
+                <a:cs typeface="Arial" pitchFamily="34" charset="-120"/>
+              </a:rPr>
+              <a:t>재미</a:t>
+            </a:r>
+            <a:endParaRPr lang="en-US" sz="1150" dirty="0"/>
+          </a:p>
+        </p:txBody>
+      </p:sp>
+      <p:sp>
+        <p:nvSpPr>
+          <p:cNvPr id="21" name="Text 19"/>
+          <p:cNvSpPr/>
+          <p:nvPr/>
+        </p:nvSpPr>
+        <p:spPr>
+          <a:xfrm>
+            <a:off x="777240" y="4937760"/>
+            <a:ext cx="10637215" cy="548640"/>
+          </a:xfrm>
+          <a:prstGeom prst="rect">
+            <a:avLst/>
+          </a:prstGeom>
+          <a:noFill/>
+          <a:ln/>
+        </p:spPr>
+        <p:txBody>
+          <a:bodyPr wrap="square" lIns="0" tIns="0" rIns="0" bIns="0" rtlCol="0" anchor="t"/>
+          <a:lstStyle/>
+          <a:p>
+            <a:pPr indent="0" marL="0">
+              <a:buNone/>
+            </a:pPr>
+            <a:r>
+              <a:rPr lang="en-US" sz="1400" b="1" dirty="0">
+                <a:solidFill>
+                  <a:srgbClr val="EE4B2B"/>
+                </a:solidFill>
+                <a:latin typeface="Arial" pitchFamily="34" charset="0"/>
+                <a:ea typeface="Arial" pitchFamily="34" charset="-122"/>
+                <a:cs typeface="Arial" pitchFamily="34" charset="-120"/>
+              </a:rPr>
+              <a:t>모델은 Create ML로 15분 — 나머지는 여러분의 바이브 코딩. 다음 미팅 팀 공유 시간에 시연합니다.</a:t>
+            </a:r>
+            <a:endParaRPr lang="en-US" sz="1400" dirty="0"/>
+          </a:p>
+        </p:txBody>
+      </p:sp>
+      <p:sp>
+        <p:nvSpPr>
+          <p:cNvPr id="22" name="Text 20"/>
+          <p:cNvSpPr/>
+          <p:nvPr/>
+        </p:nvSpPr>
+        <p:spPr>
+          <a:xfrm>
+            <a:off x="777240" y="6355080"/>
+            <a:ext cx="7315200" cy="237744"/>
+          </a:xfrm>
+          <a:prstGeom prst="rect">
+            <a:avLst/>
+          </a:prstGeom>
+          <a:noFill/>
+          <a:ln/>
+        </p:spPr>
+        <p:txBody>
+          <a:bodyPr wrap="square" lIns="0" tIns="0" rIns="0" bIns="0" rtlCol="0" anchor="ctr"/>
+          <a:lstStyle/>
+          <a:p>
+            <a:pPr indent="0" marL="0">
+              <a:buNone/>
+            </a:pPr>
+            <a:r>
+              <a:rPr lang="en-US" sz="900" dirty="0">
+                <a:solidFill>
+                  <a:srgbClr val="9AA0A6"/>
+                </a:solidFill>
+                <a:latin typeface="Arial" pitchFamily="34" charset="0"/>
+                <a:ea typeface="Arial" pitchFamily="34" charset="-122"/>
+                <a:cs typeface="Arial" pitchFamily="34" charset="-120"/>
+              </a:rPr>
+              <a:t>CreateML 스터디 · 4주차 · Sound Classification</a:t>
+            </a:r>
+            <a:endParaRPr lang="en-US" sz="900" dirty="0"/>
+          </a:p>
+        </p:txBody>
+      </p:sp>
+      <p:sp>
+        <p:nvSpPr>
+          <p:cNvPr id="23" name="Text 21"/>
+          <p:cNvSpPr/>
+          <p:nvPr/>
+        </p:nvSpPr>
+        <p:spPr>
+          <a:xfrm>
+            <a:off x="10865815" y="6355080"/>
+            <a:ext cx="548640" cy="237744"/>
+          </a:xfrm>
+          <a:prstGeom prst="rect">
+            <a:avLst/>
+          </a:prstGeom>
+          <a:noFill/>
+          <a:ln/>
+        </p:spPr>
+        <p:txBody>
+          <a:bodyPr wrap="square" lIns="0" tIns="0" rIns="0" bIns="0" rtlCol="0" anchor="ctr"/>
+          <a:lstStyle/>
+          <a:p>
+            <a:pPr algn="r" indent="0" marL="0">
+              <a:buNone/>
+            </a:pPr>
+            <a:r>
+              <a:rPr lang="en-US" sz="900" dirty="0">
+                <a:solidFill>
+                  <a:srgbClr val="9AA0A6"/>
+                </a:solidFill>
+                <a:latin typeface="Arial" pitchFamily="34" charset="0"/>
+                <a:ea typeface="Arial" pitchFamily="34" charset="-122"/>
+                <a:cs typeface="Arial" pitchFamily="34" charset="-120"/>
+              </a:rPr>
+              <a:t>32</a:t>
+            </a:r>
+            <a:endParaRPr lang="en-US" sz="900" dirty="0"/>
+          </a:p>
+        </p:txBody>
+      </p:sp>
+    </p:spTree>
+  </p:cSld>
+  <p:clrMapOvr>
+    <a:masterClrMapping/>
+  </p:clrMapOvr>
+</p:sld>
+</file>
+
+<file path=ppt/slides/slide45.xml><?xml version="1.0" encoding="utf-8"?>
+<p:sld xmlns:a="http://schemas.openxmlformats.org/drawingml/2006/main" xmlns:r="http://schemas.openxmlformats.org/officeDocument/2006/relationships" xmlns:p="http://schemas.openxmlformats.org/presentationml/2006/main">
+  <p:cSld name="Slide 45">
     <p:bg>
       <p:bgPr>
         <a:solidFill>
@@ -21004,9 +22604,9 @@
 </p:sld>
 </file>
 
-<file path=ppt/slides/slide44.xml><?xml version="1.0" encoding="utf-8"?>
+<file path=ppt/slides/slide46.xml><?xml version="1.0" encoding="utf-8"?>
 <p:sld xmlns:a="http://schemas.openxmlformats.org/drawingml/2006/main" xmlns:r="http://schemas.openxmlformats.org/officeDocument/2006/relationships" xmlns:p="http://schemas.openxmlformats.org/presentationml/2006/main">
-  <p:cSld name="Slide 44">
+  <p:cSld name="Slide 46">
     <p:bg>
       <p:bgPr>
         <a:solidFill>
@@ -21075,9 +22675,9 @@
 </p:sld>
 </file>
 
-<file path=ppt/slides/slide45.xml><?xml version="1.0" encoding="utf-8"?>
+<file path=ppt/slides/slide47.xml><?xml version="1.0" encoding="utf-8"?>
 <p:sld xmlns:a="http://schemas.openxmlformats.org/drawingml/2006/main" xmlns:r="http://schemas.openxmlformats.org/officeDocument/2006/relationships" xmlns:p="http://schemas.openxmlformats.org/presentationml/2006/main">
-  <p:cSld name="Slide 45">
+  <p:cSld name="Slide 47">
     <p:bg>
       <p:bgPr>
         <a:solidFill>
@@ -21868,7 +23468,7 @@
                 <a:ea typeface="Arial" pitchFamily="34" charset="-122"/>
                 <a:cs typeface="Arial" pitchFamily="34" charset="-120"/>
               </a:rPr>
-              <a:t>31</a:t>
+              <a:t>33</a:t>
             </a:r>
             <a:endParaRPr lang="en-US" sz="900" dirty="0"/>
           </a:p>
